--- a/slides/20260722_progress.pptx
+++ b/slides/20260722_progress.pptx
@@ -18,6 +18,7 @@
     <p:sldId id="266" r:id="rId17"/>
     <p:sldId id="267" r:id="rId18"/>
     <p:sldId id="268" r:id="rId19"/>
+    <p:sldId id="269" r:id="rId20"/>
   </p:sldIdLst>
   <p:sldSz cx="12191695" cy="6858000" type="screen4x3"/>
   <p:notesSz cx="6858000" cy="9144000"/>
@@ -3367,6 +3368,269 @@
                 </a:solidFill>
                 <a:latin typeface="Meiryo"/>
               </a:rPr>
+              <a:t>評価方法 — exact と FIC</a:t>
+            </a:r>
+          </a:p>
+        </p:txBody>
+      </p:sp>
+      <p:sp>
+        <p:nvSpPr>
+          <p:cNvPr id="4" name="TextBox 3"/>
+          <p:cNvSpPr txBox="1"/>
+          <p:nvPr/>
+        </p:nvSpPr>
+        <p:spPr>
+          <a:xfrm>
+            <a:off x="640080" y="1143000"/>
+            <a:ext cx="10972800" cy="5394960"/>
+          </a:xfrm>
+          <a:prstGeom prst="rect">
+            <a:avLst/>
+          </a:prstGeom>
+          <a:noFill/>
+        </p:spPr>
+        <p:txBody>
+          <a:bodyPr wrap="square">
+            <a:spAutoFit/>
+          </a:bodyPr>
+          <a:lstStyle/>
+          <a:p>
+            <a:pPr>
+              <a:lnSpc>
+                <a:spcPct val="116000"/>
+              </a:lnSpc>
+              <a:spcAft>
+                <a:spcPts val="800"/>
+              </a:spcAft>
+            </a:pPr>
+            <a:r>
+              <a:rPr sz="1800" b="1">
+                <a:solidFill>
+                  <a:srgbClr val="0E7C66"/>
+                </a:solidFill>
+                <a:latin typeface="Meiryo"/>
+              </a:rPr>
+              <a:t>exact(厳密一致): </a:t>
+            </a:r>
+            <a:r>
+              <a:rPr sz="1800">
+                <a:solidFill>
+                  <a:srgbClr val="22272E"/>
+                </a:solidFill>
+                <a:latin typeface="Meiryo"/>
+              </a:rPr>
+              <a:t>「この文を復唱せよ」というプロンプト下で介入し、出力が正解文(最小対のもう片方)と完全一致した率。編集の精密さを測る</a:t>
+            </a:r>
+          </a:p>
+          <a:p>
+            <a:pPr>
+              <a:lnSpc>
+                <a:spcPct val="116000"/>
+              </a:lnSpc>
+              <a:spcAft>
+                <a:spcPts val="800"/>
+              </a:spcAft>
+            </a:pPr>
+            <a:r>
+              <a:rPr sz="1800" b="1">
+                <a:solidFill>
+                  <a:srgbClr val="0E7C66"/>
+                </a:solidFill>
+                <a:latin typeface="Meiryo"/>
+              </a:rPr>
+              <a:t>FIC(LinguaLensの指標): </a:t>
+            </a:r>
+            <a:r>
+              <a:rPr sz="1800">
+                <a:solidFill>
+                  <a:srgbClr val="22272E"/>
+                </a:solidFill>
+                <a:latin typeface="Meiryo"/>
+              </a:rPr>
+              <a:t>介入ありの生成が、介入なしと比べて対象の特徴を「より多く/より少なく」示すかをGPT-4oが判定。特徴の増減の因果効果を測る</a:t>
+            </a:r>
+          </a:p>
+          <a:p>
+            <a:pPr>
+              <a:lnSpc>
+                <a:spcPct val="116000"/>
+              </a:lnSpc>
+              <a:spcAft>
+                <a:spcPts val="800"/>
+              </a:spcAft>
+            </a:pPr>
+            <a:r>
+              <a:rPr sz="1800" b="1">
+                <a:solidFill>
+                  <a:srgbClr val="0E7C66"/>
+                </a:solidFill>
+                <a:latin typeface="Meiryo"/>
+              </a:rPr>
+              <a:t>活性の特定はfeature単位: </a:t>
+            </a:r>
+            <a:r>
+              <a:rPr sz="1800">
+                <a:solidFill>
+                  <a:srgbClr val="22272E"/>
+                </a:solidFill>
+                <a:latin typeface="Meiryo"/>
+              </a:rPr>
+              <a:t>特徴ごとに同定プール約45ペアの平均から上位64活性を選ぶ(評価文ごとには作らない)</a:t>
+            </a:r>
+          </a:p>
+          <a:p>
+            <a:pPr>
+              <a:lnSpc>
+                <a:spcPct val="116000"/>
+              </a:lnSpc>
+              <a:spcAft>
+                <a:spcPts val="800"/>
+              </a:spcAft>
+            </a:pPr>
+            <a:r>
+              <a:rPr sz="1800" b="1">
+                <a:solidFill>
+                  <a:srgbClr val="0E7C66"/>
+                </a:solidFill>
+                <a:latin typeface="Meiryo"/>
+              </a:rPr>
+              <a:t>集計軸: </a:t>
+            </a:r>
+            <a:r>
+              <a:rPr sz="1800">
+                <a:solidFill>
+                  <a:srgbClr val="22272E"/>
+                </a:solidFill>
+                <a:latin typeface="Meiryo"/>
+              </a:rPr>
+              <a:t>方向2分類(amp=足す / sup=消す)× 特徴4分類(形態・統語・意味・語用)</a:t>
+            </a:r>
+          </a:p>
+          <a:p>
+            <a:pPr>
+              <a:lnSpc>
+                <a:spcPct val="116000"/>
+              </a:lnSpc>
+              <a:spcAft>
+                <a:spcPts val="800"/>
+              </a:spcAft>
+            </a:pPr>
+            <a:r>
+              <a:rPr sz="1800" b="1">
+                <a:solidFill>
+                  <a:srgbClr val="0E7C66"/>
+                </a:solidFill>
+                <a:latin typeface="Meiryo"/>
+              </a:rPr>
+              <a:t>統制: </a:t>
+            </a:r>
+            <a:r>
+              <a:rPr sz="1800">
+                <a:solidFill>
+                  <a:srgbClr val="22272E"/>
+                </a:solidFill>
+                <a:latin typeface="Meiryo"/>
+              </a:rPr>
+              <a:t>スペックを無作為に差し替えたrandom条件・空にしたempty条件を常に併記(「介入の中身に従っているか」の検算)</a:t>
+            </a:r>
+          </a:p>
+        </p:txBody>
+      </p:sp>
+    </p:spTree>
+  </p:cSld>
+  <p:clrMapOvr>
+    <a:masterClrMapping/>
+  </p:clrMapOvr>
+</p:sld>
+</file>
+
+<file path=ppt/slides/slide11.xml><?xml version="1.0" encoding="utf-8"?>
+<p:sld xmlns:a="http://schemas.openxmlformats.org/drawingml/2006/main" xmlns:p="http://schemas.openxmlformats.org/presentationml/2006/main" xmlns:r="http://schemas.openxmlformats.org/officeDocument/2006/relationships">
+  <p:cSld>
+    <p:spTree>
+      <p:nvGrpSpPr>
+        <p:cNvPr id="1" name=""/>
+        <p:cNvGrpSpPr/>
+        <p:nvPr/>
+      </p:nvGrpSpPr>
+      <p:grpSpPr/>
+      <p:sp>
+        <p:nvSpPr>
+          <p:cNvPr id="2" name="Rectangle 1"/>
+          <p:cNvSpPr/>
+          <p:nvPr/>
+        </p:nvSpPr>
+        <p:spPr>
+          <a:xfrm>
+            <a:off x="0" y="0"/>
+            <a:ext cx="12191695" cy="146304"/>
+          </a:xfrm>
+          <a:prstGeom prst="rect">
+            <a:avLst/>
+          </a:prstGeom>
+          <a:solidFill>
+            <a:srgbClr val="0E7C66"/>
+          </a:solidFill>
+          <a:ln>
+            <a:noFill/>
+          </a:ln>
+        </p:spPr>
+        <p:style>
+          <a:lnRef idx="1">
+            <a:schemeClr val="accent1"/>
+          </a:lnRef>
+          <a:fillRef idx="3">
+            <a:schemeClr val="accent1"/>
+          </a:fillRef>
+          <a:effectRef idx="2">
+            <a:schemeClr val="accent1"/>
+          </a:effectRef>
+          <a:fontRef idx="minor">
+            <a:schemeClr val="lt1"/>
+          </a:fontRef>
+        </p:style>
+        <p:txBody>
+          <a:bodyPr rtlCol="0" anchor="ctr"/>
+          <a:lstStyle/>
+          <a:p>
+            <a:pPr algn="ctr"/>
+          </a:p>
+        </p:txBody>
+      </p:sp>
+      <p:sp>
+        <p:nvSpPr>
+          <p:cNvPr id="3" name="TextBox 2"/>
+          <p:cNvSpPr txBox="1"/>
+          <p:nvPr/>
+        </p:nvSpPr>
+        <p:spPr>
+          <a:xfrm>
+            <a:off x="502920" y="256032"/>
+            <a:ext cx="11247120" cy="731520"/>
+          </a:xfrm>
+          <a:prstGeom prst="rect">
+            <a:avLst/>
+          </a:prstGeom>
+          <a:noFill/>
+        </p:spPr>
+        <p:txBody>
+          <a:bodyPr wrap="square">
+            <a:spAutoFit/>
+          </a:bodyPr>
+          <a:lstStyle/>
+          <a:p>
+            <a:pPr algn="l">
+              <a:lnSpc>
+                <a:spcPct val="115000"/>
+              </a:lnSpc>
+            </a:pPr>
+            <a:r>
+              <a:rPr sz="2700" b="1">
+                <a:solidFill>
+                  <a:srgbClr val="22272E"/>
+                </a:solidFill>
+                <a:latin typeface="Meiryo"/>
+              </a:rPr>
               <a:t>評価時の入力プロンプト</a:t>
             </a:r>
           </a:p>
@@ -3710,7 +3974,7 @@
 </p:sld>
 </file>
 
-<file path=ppt/slides/slide11.xml><?xml version="1.0" encoding="utf-8"?>
+<file path=ppt/slides/slide12.xml><?xml version="1.0" encoding="utf-8"?>
 <p:sld xmlns:a="http://schemas.openxmlformats.org/drawingml/2006/main" xmlns:p="http://schemas.openxmlformats.org/presentationml/2006/main" xmlns:r="http://schemas.openxmlformats.org/officeDocument/2006/relationships">
   <p:cSld>
     <p:spTree>
@@ -4158,7 +4422,7 @@
 </p:sld>
 </file>
 
-<file path=ppt/slides/slide12.xml><?xml version="1.0" encoding="utf-8"?>
+<file path=ppt/slides/slide13.xml><?xml version="1.0" encoding="utf-8"?>
 <p:sld xmlns:a="http://schemas.openxmlformats.org/drawingml/2006/main" xmlns:p="http://schemas.openxmlformats.org/presentationml/2006/main" xmlns:r="http://schemas.openxmlformats.org/officeDocument/2006/relationships">
   <p:cSld>
     <p:spTree>
@@ -5141,7 +5405,7 @@
 </p:sld>
 </file>
 
-<file path=ppt/slides/slide13.xml><?xml version="1.0" encoding="utf-8"?>
+<file path=ppt/slides/slide14.xml><?xml version="1.0" encoding="utf-8"?>
 <p:sld xmlns:a="http://schemas.openxmlformats.org/drawingml/2006/main" xmlns:p="http://schemas.openxmlformats.org/presentationml/2006/main" xmlns:r="http://schemas.openxmlformats.org/officeDocument/2006/relationships">
   <p:cSld>
     <p:spTree>
@@ -6394,531 +6658,21 @@
                 </a:solidFill>
                 <a:latin typeface="Meiryo"/>
               </a:rPr>
-              <a:t>提案手法 — スペックを読む編集器がΔhを注入</a:t>
-            </a:r>
-          </a:p>
-        </p:txBody>
-      </p:sp>
-      <p:sp>
-        <p:nvSpPr>
-          <p:cNvPr id="4" name="Rounded Rectangle 3"/>
-          <p:cNvSpPr/>
-          <p:nvPr/>
-        </p:nvSpPr>
-        <p:spPr>
-          <a:xfrm>
-            <a:off x="411480" y="2286000"/>
-            <a:ext cx="1600200" cy="1051560"/>
-          </a:xfrm>
-          <a:prstGeom prst="roundRect">
-            <a:avLst/>
-          </a:prstGeom>
-          <a:solidFill>
-            <a:srgbClr val="EDF0F5"/>
-          </a:solidFill>
-          <a:ln w="20320">
-            <a:solidFill>
-              <a:srgbClr val="5E6E8C"/>
-            </a:solidFill>
-          </a:ln>
-        </p:spPr>
-        <p:style>
-          <a:lnRef idx="1">
-            <a:schemeClr val="accent1"/>
-          </a:lnRef>
-          <a:fillRef idx="3">
-            <a:schemeClr val="accent1"/>
-          </a:fillRef>
-          <a:effectRef idx="2">
-            <a:schemeClr val="accent1"/>
-          </a:effectRef>
-          <a:fontRef idx="minor">
-            <a:schemeClr val="lt1"/>
-          </a:fontRef>
-        </p:style>
-        <p:txBody>
-          <a:bodyPr rtlCol="0" anchor="ctr" wrap="square" lIns="54864" rIns="54864" tIns="36576" bIns="36576"/>
-          <a:lstStyle/>
-          <a:p>
-            <a:pPr algn="ctr"/>
-            <a:r>
-              <a:rPr sz="1200" b="1">
-                <a:solidFill>
-                  <a:srgbClr val="22272E"/>
-                </a:solidFill>
-                <a:latin typeface="Meiryo"/>
-              </a:rPr>
-              <a:t>最小対</a:t>
-            </a:r>
-          </a:p>
-          <a:p>
-            <a:pPr algn="ctr"/>
-            <a:r>
-              <a:rPr sz="1200" b="1">
-                <a:solidFill>
-                  <a:srgbClr val="22272E"/>
-                </a:solidFill>
-                <a:latin typeface="Meiryo"/>
-              </a:rPr>
-              <a:t>(同定プール)</a:t>
-            </a:r>
-          </a:p>
-          <a:p>
-            <a:pPr algn="ctr"/>
-            <a:r>
-              <a:rPr sz="1200" b="1">
-                <a:solidFill>
-                  <a:srgbClr val="22272E"/>
-                </a:solidFill>
-                <a:latin typeface="Meiryo"/>
-              </a:rPr>
-              <a:t>特徴fの例文ペア</a:t>
-            </a:r>
-          </a:p>
-        </p:txBody>
-      </p:sp>
-      <p:cxnSp>
-        <p:nvCxnSpPr>
-          <p:cNvPr id="5" name="Connector 4"/>
-          <p:cNvCxnSpPr/>
-          <p:nvPr/>
-        </p:nvCxnSpPr>
-        <p:spPr>
-          <a:xfrm>
-            <a:off x="2011680" y="2807208"/>
-            <a:ext cx="502920" cy="0"/>
-          </a:xfrm>
-          <a:prstGeom prst="line">
-            <a:avLst/>
-          </a:prstGeom>
-          <a:ln w="27940">
-            <a:solidFill>
-              <a:srgbClr val="5A6472"/>
-            </a:solidFill>
-            <a:tailEnd type="arrow"/>
-          </a:ln>
-        </p:spPr>
-        <p:style>
-          <a:lnRef idx="2">
-            <a:schemeClr val="accent1"/>
-          </a:lnRef>
-          <a:fillRef idx="0">
-            <a:schemeClr val="accent1"/>
-          </a:fillRef>
-          <a:effectRef idx="1">
-            <a:schemeClr val="accent1"/>
-          </a:effectRef>
-          <a:fontRef idx="minor">
-            <a:schemeClr val="tx1"/>
-          </a:fontRef>
-        </p:style>
-      </p:cxnSp>
-      <p:sp>
-        <p:nvSpPr>
-          <p:cNvPr id="6" name="Rounded Rectangle 5"/>
-          <p:cNvSpPr/>
-          <p:nvPr/>
-        </p:nvSpPr>
-        <p:spPr>
-          <a:xfrm>
-            <a:off x="2514600" y="2286000"/>
-            <a:ext cx="1417320" cy="1051560"/>
-          </a:xfrm>
-          <a:prstGeom prst="roundRect">
-            <a:avLst/>
-          </a:prstGeom>
-          <a:solidFill>
-            <a:srgbClr val="EDF0F5"/>
-          </a:solidFill>
-          <a:ln w="20320">
-            <a:solidFill>
-              <a:srgbClr val="5E6E8C"/>
-            </a:solidFill>
-          </a:ln>
-        </p:spPr>
-        <p:style>
-          <a:lnRef idx="1">
-            <a:schemeClr val="accent1"/>
-          </a:lnRef>
-          <a:fillRef idx="3">
-            <a:schemeClr val="accent1"/>
-          </a:fillRef>
-          <a:effectRef idx="2">
-            <a:schemeClr val="accent1"/>
-          </a:effectRef>
-          <a:fontRef idx="minor">
-            <a:schemeClr val="lt1"/>
-          </a:fontRef>
-        </p:style>
-        <p:txBody>
-          <a:bodyPr rtlCol="0" anchor="ctr" wrap="square" lIns="54864" rIns="54864" tIns="36576" bIns="36576"/>
-          <a:lstStyle/>
-          <a:p>
-            <a:pPr algn="ctr"/>
-            <a:r>
-              <a:rPr sz="1300" b="1">
-                <a:solidFill>
-                  <a:srgbClr val="22272E"/>
-                </a:solidFill>
-                <a:latin typeface="Meiryo"/>
-              </a:rPr>
-              <a:t>SAE</a:t>
-            </a:r>
-          </a:p>
-          <a:p>
-            <a:pPr algn="ctr"/>
-            <a:r>
-              <a:rPr sz="1300" b="1">
-                <a:solidFill>
-                  <a:srgbClr val="22272E"/>
-                </a:solidFill>
-                <a:latin typeface="Meiryo"/>
-              </a:rPr>
-              <a:t>(凍結)</a:t>
-            </a:r>
-          </a:p>
-        </p:txBody>
-      </p:sp>
-      <p:cxnSp>
-        <p:nvCxnSpPr>
-          <p:cNvPr id="7" name="Connector 6"/>
-          <p:cNvCxnSpPr/>
-          <p:nvPr/>
-        </p:nvCxnSpPr>
-        <p:spPr>
-          <a:xfrm>
-            <a:off x="3931920" y="2807208"/>
-            <a:ext cx="502920" cy="0"/>
-          </a:xfrm>
-          <a:prstGeom prst="line">
-            <a:avLst/>
-          </a:prstGeom>
-          <a:ln w="27940">
-            <a:solidFill>
-              <a:srgbClr val="5A6472"/>
-            </a:solidFill>
-            <a:tailEnd type="arrow"/>
-          </a:ln>
-        </p:spPr>
-        <p:style>
-          <a:lnRef idx="2">
-            <a:schemeClr val="accent1"/>
-          </a:lnRef>
-          <a:fillRef idx="0">
-            <a:schemeClr val="accent1"/>
-          </a:fillRef>
-          <a:effectRef idx="1">
-            <a:schemeClr val="accent1"/>
-          </a:effectRef>
-          <a:fontRef idx="minor">
-            <a:schemeClr val="tx1"/>
-          </a:fontRef>
-        </p:style>
-      </p:cxnSp>
-      <p:sp>
-        <p:nvSpPr>
-          <p:cNvPr id="8" name="Rounded Rectangle 7"/>
-          <p:cNvSpPr/>
-          <p:nvPr/>
-        </p:nvSpPr>
-        <p:spPr>
-          <a:xfrm>
-            <a:off x="4434840" y="2286000"/>
-            <a:ext cx="1828800" cy="1051560"/>
-          </a:xfrm>
-          <a:prstGeom prst="roundRect">
-            <a:avLst/>
-          </a:prstGeom>
-          <a:solidFill>
-            <a:srgbClr val="FFFFFF"/>
-          </a:solidFill>
-          <a:ln w="20320">
-            <a:solidFill>
-              <a:srgbClr val="5A6472"/>
-            </a:solidFill>
-          </a:ln>
-        </p:spPr>
-        <p:style>
-          <a:lnRef idx="1">
-            <a:schemeClr val="accent1"/>
-          </a:lnRef>
-          <a:fillRef idx="3">
-            <a:schemeClr val="accent1"/>
-          </a:fillRef>
-          <a:effectRef idx="2">
-            <a:schemeClr val="accent1"/>
-          </a:effectRef>
-          <a:fontRef idx="minor">
-            <a:schemeClr val="lt1"/>
-          </a:fontRef>
-        </p:style>
-        <p:txBody>
-          <a:bodyPr rtlCol="0" anchor="ctr" wrap="square" lIns="54864" rIns="54864" tIns="36576" bIns="36576"/>
-          <a:lstStyle/>
-          <a:p>
-            <a:pPr algn="ctr"/>
-            <a:r>
-              <a:rPr sz="1200" b="1">
-                <a:solidFill>
-                  <a:srgbClr val="22272E"/>
-                </a:solidFill>
-                <a:latin typeface="Meiryo"/>
-              </a:rPr>
-              <a:t>feature spec</a:t>
-            </a:r>
-          </a:p>
-          <a:p>
-            <a:pPr algn="ctr"/>
-            <a:r>
-              <a:rPr sz="1200" b="1">
-                <a:solidFill>
-                  <a:srgbClr val="22272E"/>
-                </a:solidFill>
-                <a:latin typeface="Meiryo"/>
-              </a:rPr>
-              <a:t>強める/弱める</a:t>
-            </a:r>
-          </a:p>
-          <a:p>
-            <a:pPr algn="ctr"/>
-            <a:r>
-              <a:rPr sz="1200" b="1">
-                <a:solidFill>
-                  <a:srgbClr val="22272E"/>
-                </a:solidFill>
-                <a:latin typeface="Meiryo"/>
-              </a:rPr>
-              <a:t>活性の平均リスト</a:t>
-            </a:r>
-          </a:p>
-        </p:txBody>
-      </p:sp>
-      <p:cxnSp>
-        <p:nvCxnSpPr>
-          <p:cNvPr id="9" name="Connector 8"/>
-          <p:cNvCxnSpPr/>
-          <p:nvPr/>
-        </p:nvCxnSpPr>
-        <p:spPr>
-          <a:xfrm>
-            <a:off x="6263640" y="2807208"/>
-            <a:ext cx="502920" cy="0"/>
-          </a:xfrm>
-          <a:prstGeom prst="line">
-            <a:avLst/>
-          </a:prstGeom>
-          <a:ln w="27940">
-            <a:solidFill>
-              <a:srgbClr val="5A6472"/>
-            </a:solidFill>
-            <a:tailEnd type="arrow"/>
-          </a:ln>
-        </p:spPr>
-        <p:style>
-          <a:lnRef idx="2">
-            <a:schemeClr val="accent1"/>
-          </a:lnRef>
-          <a:fillRef idx="0">
-            <a:schemeClr val="accent1"/>
-          </a:fillRef>
-          <a:effectRef idx="1">
-            <a:schemeClr val="accent1"/>
-          </a:effectRef>
-          <a:fontRef idx="minor">
-            <a:schemeClr val="tx1"/>
-          </a:fontRef>
-        </p:style>
-      </p:cxnSp>
-      <p:sp>
-        <p:nvSpPr>
-          <p:cNvPr id="10" name="Rounded Rectangle 9"/>
-          <p:cNvSpPr/>
-          <p:nvPr/>
-        </p:nvSpPr>
-        <p:spPr>
-          <a:xfrm>
-            <a:off x="6766560" y="2286000"/>
-            <a:ext cx="1737360" cy="1051560"/>
-          </a:xfrm>
-          <a:prstGeom prst="roundRect">
-            <a:avLst/>
-          </a:prstGeom>
-          <a:solidFill>
-            <a:srgbClr val="E3F0EC"/>
-          </a:solidFill>
-          <a:ln w="20320">
-            <a:solidFill>
-              <a:srgbClr val="0E7C66"/>
-            </a:solidFill>
-          </a:ln>
-        </p:spPr>
-        <p:style>
-          <a:lnRef idx="1">
-            <a:schemeClr val="accent1"/>
-          </a:lnRef>
-          <a:fillRef idx="3">
-            <a:schemeClr val="accent1"/>
-          </a:fillRef>
-          <a:effectRef idx="2">
-            <a:schemeClr val="accent1"/>
-          </a:effectRef>
-          <a:fontRef idx="minor">
-            <a:schemeClr val="lt1"/>
-          </a:fontRef>
-        </p:style>
-        <p:txBody>
-          <a:bodyPr rtlCol="0" anchor="ctr" wrap="square" lIns="54864" rIns="54864" tIns="36576" bIns="36576"/>
-          <a:lstStyle/>
-          <a:p>
-            <a:pPr algn="ctr"/>
-            <a:r>
-              <a:rPr sz="1300" b="1">
-                <a:solidFill>
-                  <a:srgbClr val="22272E"/>
-                </a:solidFill>
-                <a:latin typeface="Meiryo"/>
-              </a:rPr>
-              <a:t>編集器 editor</a:t>
-            </a:r>
-          </a:p>
-          <a:p>
-            <a:pPr algn="ctr"/>
-            <a:r>
-              <a:rPr sz="1300" b="1">
-                <a:solidFill>
-                  <a:srgbClr val="22272E"/>
-                </a:solidFill>
-                <a:latin typeface="Meiryo"/>
-              </a:rPr>
-              <a:t>(学習・EF基盤)</a:t>
-            </a:r>
-          </a:p>
-        </p:txBody>
-      </p:sp>
-      <p:cxnSp>
-        <p:nvCxnSpPr>
-          <p:cNvPr id="11" name="Connector 10"/>
-          <p:cNvCxnSpPr/>
-          <p:nvPr/>
-        </p:nvCxnSpPr>
-        <p:spPr>
-          <a:xfrm>
-            <a:off x="8503920" y="2807208"/>
-            <a:ext cx="502920" cy="0"/>
-          </a:xfrm>
-          <a:prstGeom prst="line">
-            <a:avLst/>
-          </a:prstGeom>
-          <a:ln w="27940">
-            <a:solidFill>
-              <a:srgbClr val="0E7C66"/>
-            </a:solidFill>
-            <a:tailEnd type="arrow"/>
-          </a:ln>
-        </p:spPr>
-        <p:style>
-          <a:lnRef idx="2">
-            <a:schemeClr val="accent1"/>
-          </a:lnRef>
-          <a:fillRef idx="0">
-            <a:schemeClr val="accent1"/>
-          </a:fillRef>
-          <a:effectRef idx="1">
-            <a:schemeClr val="accent1"/>
-          </a:effectRef>
-          <a:fontRef idx="minor">
-            <a:schemeClr val="tx1"/>
-          </a:fontRef>
-        </p:style>
-      </p:cxnSp>
-      <p:sp>
-        <p:nvSpPr>
-          <p:cNvPr id="12" name="Rounded Rectangle 11"/>
-          <p:cNvSpPr/>
-          <p:nvPr/>
-        </p:nvSpPr>
-        <p:spPr>
-          <a:xfrm>
-            <a:off x="9006840" y="2286000"/>
-            <a:ext cx="2468880" cy="1051560"/>
-          </a:xfrm>
-          <a:prstGeom prst="roundRect">
-            <a:avLst/>
-          </a:prstGeom>
-          <a:solidFill>
-            <a:srgbClr val="EDF0F5"/>
-          </a:solidFill>
-          <a:ln w="20320">
-            <a:solidFill>
-              <a:srgbClr val="5E6E8C"/>
-            </a:solidFill>
-          </a:ln>
-        </p:spPr>
-        <p:style>
-          <a:lnRef idx="1">
-            <a:schemeClr val="accent1"/>
-          </a:lnRef>
-          <a:fillRef idx="3">
-            <a:schemeClr val="accent1"/>
-          </a:fillRef>
-          <a:effectRef idx="2">
-            <a:schemeClr val="accent1"/>
-          </a:effectRef>
-          <a:fontRef idx="minor">
-            <a:schemeClr val="lt1"/>
-          </a:fontRef>
-        </p:style>
-        <p:txBody>
-          <a:bodyPr rtlCol="0" anchor="ctr" wrap="square" lIns="54864" rIns="54864" tIns="36576" bIns="36576"/>
-          <a:lstStyle/>
-          <a:p>
-            <a:pPr algn="ctr"/>
-            <a:r>
-              <a:rPr sz="1200" b="1">
-                <a:solidFill>
-                  <a:srgbClr val="22272E"/>
-                </a:solidFill>
-                <a:latin typeface="Meiryo"/>
-              </a:rPr>
-              <a:t>凍結LM 層Lの</a:t>
-            </a:r>
-          </a:p>
-          <a:p>
-            <a:pPr algn="ctr"/>
-            <a:r>
-              <a:rPr sz="1200" b="1">
-                <a:solidFill>
-                  <a:srgbClr val="22272E"/>
-                </a:solidFill>
-                <a:latin typeface="Meiryo"/>
-              </a:rPr>
-              <a:t>residual streamに</a:t>
-            </a:r>
-          </a:p>
-          <a:p>
-            <a:pPr algn="ctr"/>
-            <a:r>
-              <a:rPr sz="1200" b="1">
-                <a:solidFill>
-                  <a:srgbClr val="22272E"/>
-                </a:solidFill>
-                <a:latin typeface="Meiryo"/>
-              </a:rPr>
-              <a:t>Δhを加算</a:t>
-            </a:r>
-          </a:p>
-        </p:txBody>
-      </p:sp>
-      <p:sp>
-        <p:nvSpPr>
-          <p:cNvPr id="13" name="TextBox 12"/>
+              <a:t>先行研究④ LLM2Vec (BehnamGhader+ 2024) — 編集器の本体</a:t>
+            </a:r>
+          </a:p>
+        </p:txBody>
+      </p:sp>
+      <p:sp>
+        <p:nvSpPr>
+          <p:cNvPr id="4" name="TextBox 3"/>
           <p:cNvSpPr txBox="1"/>
           <p:nvPr/>
         </p:nvSpPr>
         <p:spPr>
           <a:xfrm>
-            <a:off x="8686800" y="1901952"/>
-            <a:ext cx="1097280" cy="365760"/>
+            <a:off x="640080" y="1143000"/>
+            <a:ext cx="10972800" cy="5394960"/>
           </a:xfrm>
           <a:prstGeom prst="rect">
             <a:avLst/>
@@ -6931,225 +6685,172 @@
           </a:bodyPr>
           <a:lstStyle/>
           <a:p>
-            <a:pPr algn="l">
+            <a:pPr>
               <a:lnSpc>
-                <a:spcPct val="115000"/>
+                <a:spcPct val="116000"/>
               </a:lnSpc>
+              <a:spcAft>
+                <a:spcPts val="800"/>
+              </a:spcAft>
             </a:pPr>
             <a:r>
-              <a:rPr sz="1600" b="1">
+              <a:rPr sz="1700" b="1">
                 <a:solidFill>
                   <a:srgbClr val="0E7C66"/>
                 </a:solidFill>
                 <a:latin typeface="Meiryo"/>
               </a:rPr>
-              <a:t>+Δh</a:t>
-            </a:r>
-          </a:p>
-        </p:txBody>
-      </p:sp>
-      <p:cxnSp>
-        <p:nvCxnSpPr>
-          <p:cNvPr id="14" name="Connector 13"/>
-          <p:cNvCxnSpPr/>
-          <p:nvPr/>
-        </p:nvCxnSpPr>
-        <p:spPr>
-          <a:xfrm>
-            <a:off x="10241280" y="3337560"/>
-            <a:ext cx="0" cy="502920"/>
-          </a:xfrm>
-          <a:prstGeom prst="line">
-            <a:avLst/>
-          </a:prstGeom>
-          <a:ln w="27940">
-            <a:solidFill>
-              <a:srgbClr val="5A6472"/>
-            </a:solidFill>
-            <a:tailEnd type="arrow"/>
-          </a:ln>
-        </p:spPr>
-        <p:style>
-          <a:lnRef idx="2">
-            <a:schemeClr val="accent1"/>
-          </a:lnRef>
-          <a:fillRef idx="0">
-            <a:schemeClr val="accent1"/>
-          </a:fillRef>
-          <a:effectRef idx="1">
-            <a:schemeClr val="accent1"/>
-          </a:effectRef>
-          <a:fontRef idx="minor">
-            <a:schemeClr val="tx1"/>
-          </a:fontRef>
-        </p:style>
-      </p:cxnSp>
-      <p:sp>
-        <p:nvSpPr>
-          <p:cNvPr id="15" name="TextBox 14"/>
-          <p:cNvSpPr txBox="1"/>
-          <p:nvPr/>
-        </p:nvSpPr>
-        <p:spPr>
-          <a:xfrm>
-            <a:off x="9144000" y="3886200"/>
-            <a:ext cx="2926080" cy="365760"/>
-          </a:xfrm>
-          <a:prstGeom prst="rect">
-            <a:avLst/>
-          </a:prstGeom>
-          <a:noFill/>
-        </p:spPr>
-        <p:txBody>
-          <a:bodyPr wrap="square">
-            <a:spAutoFit/>
-          </a:bodyPr>
-          <a:lstStyle/>
-          <a:p>
-            <a:pPr algn="l">
+              <a:t>何をする手法か: </a:t>
+            </a:r>
+            <a:r>
+              <a:rPr sz="1700">
+                <a:solidFill>
+                  <a:srgbClr val="22272E"/>
+                </a:solidFill>
+                <a:latin typeface="Meiryo"/>
+              </a:rPr>
+              <a:t>生成用のLLM(デコーダ型)を、文を「読む」ための高性能エンコーダに作り変えるレシピ</a:t>
+            </a:r>
+          </a:p>
+          <a:p>
+            <a:pPr>
               <a:lnSpc>
-                <a:spcPct val="115000"/>
+                <a:spcPct val="116000"/>
               </a:lnSpc>
+              <a:spcAft>
+                <a:spcPts val="800"/>
+              </a:spcAft>
             </a:pPr>
             <a:r>
-              <a:rPr sz="1300" b="0">
+              <a:rPr sz="1700" b="1">
+                <a:solidFill>
+                  <a:srgbClr val="0E7C66"/>
+                </a:solidFill>
+                <a:latin typeface="Meiryo"/>
+              </a:rPr>
+              <a:t>なぜ必要か: </a:t>
+            </a:r>
+            <a:r>
+              <a:rPr sz="1700">
                 <a:solidFill>
                   <a:srgbClr val="22272E"/>
                 </a:solidFill>
                 <a:latin typeface="Meiryo"/>
               </a:rPr>
-              <a:t>編集後の文(凍結LMが生成)</a:t>
-            </a:r>
-          </a:p>
-        </p:txBody>
-      </p:sp>
-      <p:cxnSp>
-        <p:nvCxnSpPr>
-          <p:cNvPr id="16" name="Connector 15"/>
-          <p:cNvCxnSpPr/>
-          <p:nvPr/>
-        </p:nvCxnSpPr>
-        <p:spPr>
-          <a:xfrm>
-            <a:off x="5349240" y="3337560"/>
-            <a:ext cx="4251960" cy="1005840"/>
-          </a:xfrm>
-          <a:prstGeom prst="line">
-            <a:avLst/>
-          </a:prstGeom>
-          <a:ln w="27940">
-            <a:prstDash val="dash"/>
-            <a:solidFill>
-              <a:srgbClr val="8A929E"/>
-            </a:solidFill>
-            <a:tailEnd type="arrow"/>
-          </a:ln>
-        </p:spPr>
-        <p:style>
-          <a:lnRef idx="2">
-            <a:schemeClr val="accent1"/>
-          </a:lnRef>
-          <a:fillRef idx="0">
-            <a:schemeClr val="accent1"/>
-          </a:fillRef>
-          <a:effectRef idx="1">
-            <a:schemeClr val="accent1"/>
-          </a:effectRef>
-          <a:fontRef idx="minor">
-            <a:schemeClr val="tx1"/>
-          </a:fontRef>
-        </p:style>
-      </p:cxnSp>
-      <p:sp>
-        <p:nvSpPr>
-          <p:cNvPr id="17" name="TextBox 16"/>
-          <p:cNvSpPr txBox="1"/>
-          <p:nvPr/>
-        </p:nvSpPr>
-        <p:spPr>
-          <a:xfrm>
-            <a:off x="4846320" y="4434840"/>
-            <a:ext cx="5486400" cy="365760"/>
-          </a:xfrm>
-          <a:prstGeom prst="rect">
-            <a:avLst/>
-          </a:prstGeom>
-          <a:noFill/>
-        </p:spPr>
-        <p:txBody>
-          <a:bodyPr wrap="square">
-            <a:spAutoFit/>
-          </a:bodyPr>
-          <a:lstStyle/>
-          <a:p>
-            <a:pPr algn="l">
+              <a:t>生成用LLMの注意は「自分より前の単語」しか見えない(因果注意)。しかし編集の判断には文全体 — 特に後ろの文脈 — が必要(例:「The key are…」のareを直すには後ろまで読む必要がある)</a:t>
+            </a:r>
+          </a:p>
+          <a:p>
+            <a:pPr>
               <a:lnSpc>
-                <a:spcPct val="115000"/>
+                <a:spcPct val="116000"/>
               </a:lnSpc>
+              <a:spcAft>
+                <a:spcPts val="800"/>
+              </a:spcAft>
             </a:pPr>
             <a:r>
-              <a:rPr sz="1200" b="0">
-                <a:solidFill>
-                  <a:srgbClr val="8A929E"/>
-                </a:solidFill>
-                <a:latin typeface="Meiryo"/>
-              </a:rPr>
-              <a:t>LinguaLens: 編集器を通さず活性値を直接書き換え(0/10に固定)</a:t>
-            </a:r>
-          </a:p>
-        </p:txBody>
-      </p:sp>
-      <p:sp>
-        <p:nvSpPr>
-          <p:cNvPr id="18" name="TextBox 17"/>
-          <p:cNvSpPr txBox="1"/>
-          <p:nvPr/>
-        </p:nvSpPr>
-        <p:spPr>
-          <a:xfrm>
-            <a:off x="502920" y="1143000"/>
-            <a:ext cx="11155680" cy="914400"/>
-          </a:xfrm>
-          <a:prstGeom prst="rect">
-            <a:avLst/>
-          </a:prstGeom>
-          <a:noFill/>
-        </p:spPr>
-        <p:txBody>
-          <a:bodyPr wrap="square">
-            <a:spAutoFit/>
-          </a:bodyPr>
-          <a:lstStyle/>
-          <a:p>
-            <a:pPr algn="l">
+              <a:rPr sz="1700" b="1">
+                <a:solidFill>
+                  <a:srgbClr val="0E7C66"/>
+                </a:solidFill>
+                <a:latin typeface="Meiryo"/>
+              </a:rPr>
+              <a:t>3つのステップ(平易に): </a:t>
+            </a:r>
+            <a:r>
+              <a:rPr sz="1700">
+                <a:solidFill>
+                  <a:srgbClr val="22272E"/>
+                </a:solidFill>
+                <a:latin typeface="Meiryo"/>
+              </a:rPr>
+              <a:t/>
+            </a:r>
+          </a:p>
+          <a:p>
+            <a:pPr lvl="1">
               <a:lnSpc>
-                <a:spcPct val="115000"/>
+                <a:spcPct val="116000"/>
               </a:lnSpc>
+              <a:spcAft>
+                <a:spcPts val="800"/>
+              </a:spcAft>
             </a:pPr>
             <a:r>
-              <a:rPr sz="1500" b="0">
+              <a:rPr sz="1500">
                 <a:solidFill>
                   <a:srgbClr val="5A6472"/>
                 </a:solidFill>
                 <a:latin typeface="Meiryo"/>
               </a:rPr>
-              <a:t>ポイント: スペックは特徴ごとに事前に用意(同定プールの平均)— 評価する文からは作らない。</a:t>
-            </a:r>
-          </a:p>
-          <a:p>
-            <a:pPr algn="l">
+              <a:t>① 注意を双方向化 — 後ろの単語も見られるようにスイッチを切り替える</a:t>
+            </a:r>
+          </a:p>
+          <a:p>
+            <a:pPr lvl="1">
               <a:lnSpc>
-                <a:spcPct val="115000"/>
+                <a:spcPct val="116000"/>
               </a:lnSpc>
+              <a:spcAft>
+                <a:spcPts val="800"/>
+              </a:spcAft>
             </a:pPr>
             <a:r>
-              <a:rPr sz="1500" b="0">
+              <a:rPr sz="1500">
                 <a:solidFill>
                   <a:srgbClr val="5A6472"/>
                 </a:solidFill>
                 <a:latin typeface="Meiryo"/>
               </a:rPr>
-              <a:t>編集器は「どこを・どれだけ直すか」を文とスペックから自分で決める。テキストは凍結LM自身が出す。</a:t>
+              <a:t>② マスク語当てで慣らす — 文中の単語を隠して当てる練習をさせ、双方向の読み方に適応させる</a:t>
+            </a:r>
+          </a:p>
+          <a:p>
+            <a:pPr lvl="1">
+              <a:lnSpc>
+                <a:spcPct val="116000"/>
+              </a:lnSpc>
+              <a:spcAft>
+                <a:spcPts val="800"/>
+              </a:spcAft>
+            </a:pPr>
+            <a:r>
+              <a:rPr sz="1500">
+                <a:solidFill>
+                  <a:srgbClr val="5A6472"/>
+                </a:solidFill>
+                <a:latin typeface="Meiryo"/>
+              </a:rPr>
+              <a:t>③ 文埋め込みの対比学習 — 同じ文同士を近く、違う文を遠くに配置(SimCSE)</a:t>
+            </a:r>
+          </a:p>
+          <a:p>
+            <a:pPr>
+              <a:lnSpc>
+                <a:spcPct val="116000"/>
+              </a:lnSpc>
+              <a:spcAft>
+                <a:spcPts val="800"/>
+              </a:spcAft>
+            </a:pPr>
+            <a:r>
+              <a:rPr sz="1700" b="1">
+                <a:solidFill>
+                  <a:srgbClr val="0E7C66"/>
+                </a:solidFill>
+                <a:latin typeface="Meiryo"/>
+              </a:rPr>
+              <a:t>本研究での役割: </a:t>
+            </a:r>
+            <a:r>
+              <a:rPr sz="1700">
+                <a:solidFill>
+                  <a:srgbClr val="22272E"/>
+                </a:solidFill>
+                <a:latin typeface="Meiryo"/>
+              </a:rPr>
+              <a:t>編集器の本体 = Gemma-2-2BのLLM2Vec化。凍結LM・SAEと同じモデル系列なので内部表現の相性が良い。さらに合成データ作成時の「文の自然さ採点」にも同じエンコーダを利用</a:t>
             </a:r>
           </a:p>
         </p:txBody>
@@ -7249,7 +6950,7 @@
                 </a:solidFill>
                 <a:latin typeface="Meiryo"/>
               </a:rPr>
-              <a:t>学習方法 — 4段階(すべて自己教師あり)</a:t>
+              <a:t>提案手法 — スペックを読む編集器がΔhを注入</a:t>
             </a:r>
           </a:p>
         </p:txBody>
@@ -7262,8 +6963,338 @@
         </p:nvSpPr>
         <p:spPr>
           <a:xfrm>
-            <a:off x="457200" y="1554480"/>
-            <a:ext cx="2651760" cy="1920240"/>
+            <a:off x="411480" y="2286000"/>
+            <a:ext cx="1600200" cy="1051560"/>
+          </a:xfrm>
+          <a:prstGeom prst="roundRect">
+            <a:avLst/>
+          </a:prstGeom>
+          <a:solidFill>
+            <a:srgbClr val="EDF0F5"/>
+          </a:solidFill>
+          <a:ln w="20320">
+            <a:solidFill>
+              <a:srgbClr val="5E6E8C"/>
+            </a:solidFill>
+          </a:ln>
+        </p:spPr>
+        <p:style>
+          <a:lnRef idx="1">
+            <a:schemeClr val="accent1"/>
+          </a:lnRef>
+          <a:fillRef idx="3">
+            <a:schemeClr val="accent1"/>
+          </a:fillRef>
+          <a:effectRef idx="2">
+            <a:schemeClr val="accent1"/>
+          </a:effectRef>
+          <a:fontRef idx="minor">
+            <a:schemeClr val="lt1"/>
+          </a:fontRef>
+        </p:style>
+        <p:txBody>
+          <a:bodyPr rtlCol="0" anchor="ctr" wrap="square" lIns="54864" rIns="54864" tIns="36576" bIns="36576"/>
+          <a:lstStyle/>
+          <a:p>
+            <a:pPr algn="ctr"/>
+            <a:r>
+              <a:rPr sz="1200" b="1">
+                <a:solidFill>
+                  <a:srgbClr val="22272E"/>
+                </a:solidFill>
+                <a:latin typeface="Meiryo"/>
+              </a:rPr>
+              <a:t>最小対</a:t>
+            </a:r>
+          </a:p>
+          <a:p>
+            <a:pPr algn="ctr"/>
+            <a:r>
+              <a:rPr sz="1200" b="1">
+                <a:solidFill>
+                  <a:srgbClr val="22272E"/>
+                </a:solidFill>
+                <a:latin typeface="Meiryo"/>
+              </a:rPr>
+              <a:t>(同定プール)</a:t>
+            </a:r>
+          </a:p>
+          <a:p>
+            <a:pPr algn="ctr"/>
+            <a:r>
+              <a:rPr sz="1200" b="1">
+                <a:solidFill>
+                  <a:srgbClr val="22272E"/>
+                </a:solidFill>
+                <a:latin typeface="Meiryo"/>
+              </a:rPr>
+              <a:t>特徴fの例文ペア</a:t>
+            </a:r>
+          </a:p>
+        </p:txBody>
+      </p:sp>
+      <p:cxnSp>
+        <p:nvCxnSpPr>
+          <p:cNvPr id="5" name="Connector 4"/>
+          <p:cNvCxnSpPr/>
+          <p:nvPr/>
+        </p:nvCxnSpPr>
+        <p:spPr>
+          <a:xfrm>
+            <a:off x="2011680" y="2807208"/>
+            <a:ext cx="502920" cy="0"/>
+          </a:xfrm>
+          <a:prstGeom prst="line">
+            <a:avLst/>
+          </a:prstGeom>
+          <a:ln w="27940">
+            <a:solidFill>
+              <a:srgbClr val="5A6472"/>
+            </a:solidFill>
+            <a:tailEnd type="arrow"/>
+          </a:ln>
+        </p:spPr>
+        <p:style>
+          <a:lnRef idx="2">
+            <a:schemeClr val="accent1"/>
+          </a:lnRef>
+          <a:fillRef idx="0">
+            <a:schemeClr val="accent1"/>
+          </a:fillRef>
+          <a:effectRef idx="1">
+            <a:schemeClr val="accent1"/>
+          </a:effectRef>
+          <a:fontRef idx="minor">
+            <a:schemeClr val="tx1"/>
+          </a:fontRef>
+        </p:style>
+      </p:cxnSp>
+      <p:sp>
+        <p:nvSpPr>
+          <p:cNvPr id="6" name="Rounded Rectangle 5"/>
+          <p:cNvSpPr/>
+          <p:nvPr/>
+        </p:nvSpPr>
+        <p:spPr>
+          <a:xfrm>
+            <a:off x="2514600" y="2286000"/>
+            <a:ext cx="1417320" cy="1051560"/>
+          </a:xfrm>
+          <a:prstGeom prst="roundRect">
+            <a:avLst/>
+          </a:prstGeom>
+          <a:solidFill>
+            <a:srgbClr val="EDF0F5"/>
+          </a:solidFill>
+          <a:ln w="20320">
+            <a:solidFill>
+              <a:srgbClr val="5E6E8C"/>
+            </a:solidFill>
+          </a:ln>
+        </p:spPr>
+        <p:style>
+          <a:lnRef idx="1">
+            <a:schemeClr val="accent1"/>
+          </a:lnRef>
+          <a:fillRef idx="3">
+            <a:schemeClr val="accent1"/>
+          </a:fillRef>
+          <a:effectRef idx="2">
+            <a:schemeClr val="accent1"/>
+          </a:effectRef>
+          <a:fontRef idx="minor">
+            <a:schemeClr val="lt1"/>
+          </a:fontRef>
+        </p:style>
+        <p:txBody>
+          <a:bodyPr rtlCol="0" anchor="ctr" wrap="square" lIns="54864" rIns="54864" tIns="36576" bIns="36576"/>
+          <a:lstStyle/>
+          <a:p>
+            <a:pPr algn="ctr"/>
+            <a:r>
+              <a:rPr sz="1300" b="1">
+                <a:solidFill>
+                  <a:srgbClr val="22272E"/>
+                </a:solidFill>
+                <a:latin typeface="Meiryo"/>
+              </a:rPr>
+              <a:t>SAE</a:t>
+            </a:r>
+          </a:p>
+          <a:p>
+            <a:pPr algn="ctr"/>
+            <a:r>
+              <a:rPr sz="1300" b="1">
+                <a:solidFill>
+                  <a:srgbClr val="22272E"/>
+                </a:solidFill>
+                <a:latin typeface="Meiryo"/>
+              </a:rPr>
+              <a:t>(凍結)</a:t>
+            </a:r>
+          </a:p>
+        </p:txBody>
+      </p:sp>
+      <p:cxnSp>
+        <p:nvCxnSpPr>
+          <p:cNvPr id="7" name="Connector 6"/>
+          <p:cNvCxnSpPr/>
+          <p:nvPr/>
+        </p:nvCxnSpPr>
+        <p:spPr>
+          <a:xfrm>
+            <a:off x="3931920" y="2807208"/>
+            <a:ext cx="502920" cy="0"/>
+          </a:xfrm>
+          <a:prstGeom prst="line">
+            <a:avLst/>
+          </a:prstGeom>
+          <a:ln w="27940">
+            <a:solidFill>
+              <a:srgbClr val="5A6472"/>
+            </a:solidFill>
+            <a:tailEnd type="arrow"/>
+          </a:ln>
+        </p:spPr>
+        <p:style>
+          <a:lnRef idx="2">
+            <a:schemeClr val="accent1"/>
+          </a:lnRef>
+          <a:fillRef idx="0">
+            <a:schemeClr val="accent1"/>
+          </a:fillRef>
+          <a:effectRef idx="1">
+            <a:schemeClr val="accent1"/>
+          </a:effectRef>
+          <a:fontRef idx="minor">
+            <a:schemeClr val="tx1"/>
+          </a:fontRef>
+        </p:style>
+      </p:cxnSp>
+      <p:sp>
+        <p:nvSpPr>
+          <p:cNvPr id="8" name="Rounded Rectangle 7"/>
+          <p:cNvSpPr/>
+          <p:nvPr/>
+        </p:nvSpPr>
+        <p:spPr>
+          <a:xfrm>
+            <a:off x="4434840" y="2286000"/>
+            <a:ext cx="1828800" cy="1051560"/>
+          </a:xfrm>
+          <a:prstGeom prst="roundRect">
+            <a:avLst/>
+          </a:prstGeom>
+          <a:solidFill>
+            <a:srgbClr val="FFFFFF"/>
+          </a:solidFill>
+          <a:ln w="20320">
+            <a:solidFill>
+              <a:srgbClr val="5A6472"/>
+            </a:solidFill>
+          </a:ln>
+        </p:spPr>
+        <p:style>
+          <a:lnRef idx="1">
+            <a:schemeClr val="accent1"/>
+          </a:lnRef>
+          <a:fillRef idx="3">
+            <a:schemeClr val="accent1"/>
+          </a:fillRef>
+          <a:effectRef idx="2">
+            <a:schemeClr val="accent1"/>
+          </a:effectRef>
+          <a:fontRef idx="minor">
+            <a:schemeClr val="lt1"/>
+          </a:fontRef>
+        </p:style>
+        <p:txBody>
+          <a:bodyPr rtlCol="0" anchor="ctr" wrap="square" lIns="54864" rIns="54864" tIns="36576" bIns="36576"/>
+          <a:lstStyle/>
+          <a:p>
+            <a:pPr algn="ctr"/>
+            <a:r>
+              <a:rPr sz="1200" b="1">
+                <a:solidFill>
+                  <a:srgbClr val="22272E"/>
+                </a:solidFill>
+                <a:latin typeface="Meiryo"/>
+              </a:rPr>
+              <a:t>feature spec</a:t>
+            </a:r>
+          </a:p>
+          <a:p>
+            <a:pPr algn="ctr"/>
+            <a:r>
+              <a:rPr sz="1200" b="1">
+                <a:solidFill>
+                  <a:srgbClr val="22272E"/>
+                </a:solidFill>
+                <a:latin typeface="Meiryo"/>
+              </a:rPr>
+              <a:t>強める/弱める</a:t>
+            </a:r>
+          </a:p>
+          <a:p>
+            <a:pPr algn="ctr"/>
+            <a:r>
+              <a:rPr sz="1200" b="1">
+                <a:solidFill>
+                  <a:srgbClr val="22272E"/>
+                </a:solidFill>
+                <a:latin typeface="Meiryo"/>
+              </a:rPr>
+              <a:t>活性の平均リスト</a:t>
+            </a:r>
+          </a:p>
+        </p:txBody>
+      </p:sp>
+      <p:cxnSp>
+        <p:nvCxnSpPr>
+          <p:cNvPr id="9" name="Connector 8"/>
+          <p:cNvCxnSpPr/>
+          <p:nvPr/>
+        </p:nvCxnSpPr>
+        <p:spPr>
+          <a:xfrm>
+            <a:off x="6263640" y="2807208"/>
+            <a:ext cx="502920" cy="0"/>
+          </a:xfrm>
+          <a:prstGeom prst="line">
+            <a:avLst/>
+          </a:prstGeom>
+          <a:ln w="27940">
+            <a:solidFill>
+              <a:srgbClr val="5A6472"/>
+            </a:solidFill>
+            <a:tailEnd type="arrow"/>
+          </a:ln>
+        </p:spPr>
+        <p:style>
+          <a:lnRef idx="2">
+            <a:schemeClr val="accent1"/>
+          </a:lnRef>
+          <a:fillRef idx="0">
+            <a:schemeClr val="accent1"/>
+          </a:fillRef>
+          <a:effectRef idx="1">
+            <a:schemeClr val="accent1"/>
+          </a:effectRef>
+          <a:fontRef idx="minor">
+            <a:schemeClr val="tx1"/>
+          </a:fontRef>
+        </p:style>
+      </p:cxnSp>
+      <p:sp>
+        <p:nvSpPr>
+          <p:cNvPr id="10" name="Rounded Rectangle 9"/>
+          <p:cNvSpPr/>
+          <p:nvPr/>
+        </p:nvSpPr>
+        <p:spPr>
+          <a:xfrm>
+            <a:off x="6766560" y="2286000"/>
+            <a:ext cx="1737360" cy="1051560"/>
           </a:xfrm>
           <a:prstGeom prst="roundRect">
             <a:avLst/>
@@ -7297,58 +7328,46 @@
           <a:p>
             <a:pPr algn="ctr"/>
             <a:r>
-              <a:rPr sz="1200" b="1">
+              <a:rPr sz="1300" b="1">
                 <a:solidFill>
                   <a:srgbClr val="22272E"/>
                 </a:solidFill>
                 <a:latin typeface="Meiryo"/>
               </a:rPr>
-              <a:t>① LLM2Vec学習</a:t>
+              <a:t>編集器 editor</a:t>
             </a:r>
           </a:p>
           <a:p>
             <a:pPr algn="ctr"/>
             <a:r>
-              <a:rPr sz="1200" b="1">
+              <a:rPr sz="1300" b="1">
                 <a:solidFill>
                   <a:srgbClr val="22272E"/>
                 </a:solidFill>
                 <a:latin typeface="Meiryo"/>
               </a:rPr>
-              <a:t>Gemma-2-2Bを双方向</a:t>
-            </a:r>
-          </a:p>
-          <a:p>
-            <a:pPr algn="ctr"/>
-            <a:r>
-              <a:rPr sz="1200" b="1">
-                <a:solidFill>
-                  <a:srgbClr val="22272E"/>
-                </a:solidFill>
-                <a:latin typeface="Meiryo"/>
-              </a:rPr>
-              <a:t>エンコーダ化</a:t>
+              <a:t>(学習・EF基盤)</a:t>
             </a:r>
           </a:p>
         </p:txBody>
       </p:sp>
       <p:cxnSp>
         <p:nvCxnSpPr>
-          <p:cNvPr id="5" name="Connector 4"/>
+          <p:cNvPr id="11" name="Connector 10"/>
           <p:cNvCxnSpPr/>
           <p:nvPr/>
         </p:nvCxnSpPr>
         <p:spPr>
           <a:xfrm>
-            <a:off x="3108960" y="2468880"/>
-            <a:ext cx="292608" cy="0"/>
+            <a:off x="8503920" y="2807208"/>
+            <a:ext cx="502920" cy="0"/>
           </a:xfrm>
           <a:prstGeom prst="line">
             <a:avLst/>
           </a:prstGeom>
           <a:ln w="27940">
             <a:solidFill>
-              <a:srgbClr val="5A6472"/>
+              <a:srgbClr val="0E7C66"/>
             </a:solidFill>
             <a:tailEnd type="arrow"/>
           </a:ln>
@@ -7370,14 +7389,14 @@
       </p:cxnSp>
       <p:sp>
         <p:nvSpPr>
-          <p:cNvPr id="6" name="Rounded Rectangle 5"/>
+          <p:cNvPr id="12" name="Rounded Rectangle 11"/>
           <p:cNvSpPr/>
           <p:nvPr/>
         </p:nvSpPr>
         <p:spPr>
           <a:xfrm>
-            <a:off x="3429000" y="1554480"/>
-            <a:ext cx="3108960" cy="1920240"/>
+            <a:off x="9006840" y="2286000"/>
+            <a:ext cx="2468880" cy="1051560"/>
           </a:xfrm>
           <a:prstGeom prst="roundRect">
             <a:avLst/>
@@ -7417,7 +7436,7 @@
                 </a:solidFill>
                 <a:latin typeface="Meiryo"/>
               </a:rPr>
-              <a:t>② 合成データ作成</a:t>
+              <a:t>凍結LM 層Lの</a:t>
             </a:r>
           </a:p>
           <a:p>
@@ -7429,7 +7448,7 @@
                 </a:solidFill>
                 <a:latin typeface="Meiryo"/>
               </a:rPr>
-              <a:t>きれいな文をわざと壊す</a:t>
+              <a:t>residual streamに</a:t>
             </a:r>
           </a:p>
           <a:p>
@@ -7441,45 +7460,60 @@
                 </a:solidFill>
                 <a:latin typeface="Meiryo"/>
               </a:rPr>
-              <a:t>個数=幾何分布/種類=重み付き抽選</a:t>
-            </a:r>
-          </a:p>
-          <a:p>
-            <a:pPr algn="ctr"/>
-            <a:r>
-              <a:rPr sz="1200" b="1">
-                <a:solidFill>
-                  <a:srgbClr val="22272E"/>
-                </a:solidFill>
-                <a:latin typeface="Meiryo"/>
-              </a:rPr>
-              <a:t>場所=削除は壊れにくい語優先</a:t>
-            </a:r>
-          </a:p>
-          <a:p>
-            <a:pPr algn="ctr"/>
-            <a:r>
-              <a:rPr sz="1200" b="1">
-                <a:solidFill>
-                  <a:srgbClr val="22272E"/>
-                </a:solidFill>
-                <a:latin typeface="Meiryo"/>
-              </a:rPr>
-              <a:t>①のモデルで自然さを採点し選別</a:t>
+              <a:t>Δhを加算</a:t>
+            </a:r>
+          </a:p>
+        </p:txBody>
+      </p:sp>
+      <p:sp>
+        <p:nvSpPr>
+          <p:cNvPr id="13" name="TextBox 12"/>
+          <p:cNvSpPr txBox="1"/>
+          <p:nvPr/>
+        </p:nvSpPr>
+        <p:spPr>
+          <a:xfrm>
+            <a:off x="8686800" y="1901952"/>
+            <a:ext cx="1097280" cy="365760"/>
+          </a:xfrm>
+          <a:prstGeom prst="rect">
+            <a:avLst/>
+          </a:prstGeom>
+          <a:noFill/>
+        </p:spPr>
+        <p:txBody>
+          <a:bodyPr wrap="square">
+            <a:spAutoFit/>
+          </a:bodyPr>
+          <a:lstStyle/>
+          <a:p>
+            <a:pPr algn="l">
+              <a:lnSpc>
+                <a:spcPct val="115000"/>
+              </a:lnSpc>
+            </a:pPr>
+            <a:r>
+              <a:rPr sz="1600" b="1">
+                <a:solidFill>
+                  <a:srgbClr val="0E7C66"/>
+                </a:solidFill>
+                <a:latin typeface="Meiryo"/>
+              </a:rPr>
+              <a:t>+Δh</a:t>
             </a:r>
           </a:p>
         </p:txBody>
       </p:sp>
       <p:cxnSp>
         <p:nvCxnSpPr>
-          <p:cNvPr id="7" name="Connector 6"/>
+          <p:cNvPr id="14" name="Connector 13"/>
           <p:cNvCxnSpPr/>
           <p:nvPr/>
         </p:nvCxnSpPr>
         <p:spPr>
           <a:xfrm>
-            <a:off x="6537960" y="2468880"/>
-            <a:ext cx="292608" cy="0"/>
+            <a:off x="10241280" y="3337560"/>
+            <a:ext cx="0" cy="502920"/>
           </a:xfrm>
           <a:prstGeom prst="line">
             <a:avLst/>
@@ -7508,99 +7542,61 @@
       </p:cxnSp>
       <p:sp>
         <p:nvSpPr>
-          <p:cNvPr id="8" name="Rounded Rectangle 7"/>
-          <p:cNvSpPr/>
+          <p:cNvPr id="15" name="TextBox 14"/>
+          <p:cNvSpPr txBox="1"/>
           <p:nvPr/>
         </p:nvSpPr>
         <p:spPr>
           <a:xfrm>
-            <a:off x="6858000" y="1554480"/>
-            <a:ext cx="2651760" cy="1920240"/>
-          </a:xfrm>
-          <a:prstGeom prst="roundRect">
+            <a:off x="9144000" y="3886200"/>
+            <a:ext cx="2926080" cy="365760"/>
+          </a:xfrm>
+          <a:prstGeom prst="rect">
             <a:avLst/>
           </a:prstGeom>
-          <a:solidFill>
-            <a:srgbClr val="E3F0EC"/>
-          </a:solidFill>
-          <a:ln w="20320">
-            <a:solidFill>
-              <a:srgbClr val="0E7C66"/>
-            </a:solidFill>
-          </a:ln>
-        </p:spPr>
-        <p:style>
-          <a:lnRef idx="1">
-            <a:schemeClr val="accent1"/>
-          </a:lnRef>
-          <a:fillRef idx="3">
-            <a:schemeClr val="accent1"/>
-          </a:fillRef>
-          <a:effectRef idx="2">
-            <a:schemeClr val="accent1"/>
-          </a:effectRef>
-          <a:fontRef idx="minor">
-            <a:schemeClr val="lt1"/>
-          </a:fontRef>
-        </p:style>
-        <p:txBody>
-          <a:bodyPr rtlCol="0" anchor="ctr" wrap="square" lIns="54864" rIns="54864" tIns="36576" bIns="36576"/>
-          <a:lstStyle/>
-          <a:p>
-            <a:pPr algn="ctr"/>
-            <a:r>
-              <a:rPr sz="1200" b="1">
+          <a:noFill/>
+        </p:spPr>
+        <p:txBody>
+          <a:bodyPr wrap="square">
+            <a:spAutoFit/>
+          </a:bodyPr>
+          <a:lstStyle/>
+          <a:p>
+            <a:pPr algn="l">
+              <a:lnSpc>
+                <a:spcPct val="115000"/>
+              </a:lnSpc>
+            </a:pPr>
+            <a:r>
+              <a:rPr sz="1300" b="0">
                 <a:solidFill>
                   <a:srgbClr val="22272E"/>
                 </a:solidFill>
                 <a:latin typeface="Meiryo"/>
               </a:rPr>
-              <a:t>③ EF基盤の学習</a:t>
-            </a:r>
-          </a:p>
-          <a:p>
-            <a:pPr algn="ctr"/>
-            <a:r>
-              <a:rPr sz="1200" b="1">
-                <a:solidFill>
-                  <a:srgbClr val="22272E"/>
-                </a:solidFill>
-                <a:latin typeface="Meiryo"/>
-              </a:rPr>
-              <a:t>壊れた文→元の文へ戻す</a:t>
-            </a:r>
-          </a:p>
-          <a:p>
-            <a:pPr algn="ctr"/>
-            <a:r>
-              <a:rPr sz="1200" b="1">
-                <a:solidFill>
-                  <a:srgbClr val="22272E"/>
-                </a:solidFill>
-                <a:latin typeface="Meiryo"/>
-              </a:rPr>
-              <a:t>編集操作(挿入/削除/置換)を学習</a:t>
+              <a:t>編集後の文(凍結LMが生成)</a:t>
             </a:r>
           </a:p>
         </p:txBody>
       </p:sp>
       <p:cxnSp>
         <p:nvCxnSpPr>
-          <p:cNvPr id="9" name="Connector 8"/>
+          <p:cNvPr id="16" name="Connector 15"/>
           <p:cNvCxnSpPr/>
           <p:nvPr/>
         </p:nvCxnSpPr>
         <p:spPr>
           <a:xfrm>
-            <a:off x="9509760" y="2468880"/>
-            <a:ext cx="292608" cy="0"/>
+            <a:off x="5349240" y="3337560"/>
+            <a:ext cx="4251960" cy="1005840"/>
           </a:xfrm>
           <a:prstGeom prst="line">
             <a:avLst/>
           </a:prstGeom>
           <a:ln w="27940">
+            <a:prstDash val="dash"/>
             <a:solidFill>
-              <a:srgbClr val="5A6472"/>
+              <a:srgbClr val="8A929E"/>
             </a:solidFill>
             <a:tailEnd type="arrow"/>
           </a:ln>
@@ -7622,104 +7618,14 @@
       </p:cxnSp>
       <p:sp>
         <p:nvSpPr>
-          <p:cNvPr id="10" name="Rounded Rectangle 9"/>
-          <p:cNvSpPr/>
-          <p:nvPr/>
-        </p:nvSpPr>
-        <p:spPr>
-          <a:xfrm>
-            <a:off x="9829800" y="1554480"/>
-            <a:ext cx="2651760" cy="1920240"/>
-          </a:xfrm>
-          <a:prstGeom prst="roundRect">
-            <a:avLst/>
-          </a:prstGeom>
-          <a:solidFill>
-            <a:srgbClr val="E3F0EC"/>
-          </a:solidFill>
-          <a:ln w="20320">
-            <a:solidFill>
-              <a:srgbClr val="0E7C66"/>
-            </a:solidFill>
-          </a:ln>
-        </p:spPr>
-        <p:style>
-          <a:lnRef idx="1">
-            <a:schemeClr val="accent1"/>
-          </a:lnRef>
-          <a:fillRef idx="3">
-            <a:schemeClr val="accent1"/>
-          </a:fillRef>
-          <a:effectRef idx="2">
-            <a:schemeClr val="accent1"/>
-          </a:effectRef>
-          <a:fontRef idx="minor">
-            <a:schemeClr val="lt1"/>
-          </a:fontRef>
-        </p:style>
-        <p:txBody>
-          <a:bodyPr rtlCol="0" anchor="ctr" wrap="square" lIns="54864" rIns="54864" tIns="36576" bIns="36576"/>
-          <a:lstStyle/>
-          <a:p>
-            <a:pPr algn="ctr"/>
-            <a:r>
-              <a:rPr sz="1200" b="1">
-                <a:solidFill>
-                  <a:srgbClr val="22272E"/>
-                </a:solidFill>
-                <a:latin typeface="Meiryo"/>
-              </a:rPr>
-              <a:t>④ 最終編集器</a:t>
-            </a:r>
-          </a:p>
-          <a:p>
-            <a:pPr algn="ctr"/>
-            <a:r>
-              <a:rPr sz="1200" b="1">
-                <a:solidFill>
-                  <a:srgbClr val="22272E"/>
-                </a:solidFill>
-                <a:latin typeface="Meiryo"/>
-              </a:rPr>
-              <a:t>出力をΔhに付け替え</a:t>
-            </a:r>
-          </a:p>
-          <a:p>
-            <a:pPr algn="ctr"/>
-            <a:r>
-              <a:rPr sz="1200" b="1">
-                <a:solidFill>
-                  <a:srgbClr val="22272E"/>
-                </a:solidFill>
-                <a:latin typeface="Meiryo"/>
-              </a:rPr>
-              <a:t>凍結LM越しの損失で学習</a:t>
-            </a:r>
-          </a:p>
-          <a:p>
-            <a:pPr algn="ctr"/>
-            <a:r>
-              <a:rPr sz="1200" b="1">
-                <a:solidFill>
-                  <a:srgbClr val="22272E"/>
-                </a:solidFill>
-                <a:latin typeface="Meiryo"/>
-              </a:rPr>
-              <a:t>(スペック誤り時は「編集しない」も教師)</a:t>
-            </a:r>
-          </a:p>
-        </p:txBody>
-      </p:sp>
-      <p:sp>
-        <p:nvSpPr>
-          <p:cNvPr id="11" name="TextBox 10"/>
+          <p:cNvPr id="17" name="TextBox 16"/>
           <p:cNvSpPr txBox="1"/>
           <p:nvPr/>
         </p:nvSpPr>
         <p:spPr>
           <a:xfrm>
-            <a:off x="502920" y="3931920"/>
-            <a:ext cx="11155680" cy="1463040"/>
+            <a:off x="4846320" y="4434840"/>
+            <a:ext cx="5486400" cy="365760"/>
           </a:xfrm>
           <a:prstGeom prst="rect">
             <a:avLst/>
@@ -7738,15 +7644,38 @@
               </a:lnSpc>
             </a:pPr>
             <a:r>
-              <a:rPr sz="1500" b="0">
-                <a:solidFill>
-                  <a:srgbClr val="5A6472"/>
-                </a:solidFill>
-                <a:latin typeface="Meiryo"/>
-              </a:rPr>
-              <a:t>学習にLinguaLens-Dataは一切使わない(ゼロショット転移)。</a:t>
-            </a:r>
-          </a:p>
+              <a:rPr sz="1200" b="0">
+                <a:solidFill>
+                  <a:srgbClr val="8A929E"/>
+                </a:solidFill>
+                <a:latin typeface="Meiryo"/>
+              </a:rPr>
+              <a:t>LinguaLens: 編集器を通さず活性値を直接書き換え(0/10に固定)</a:t>
+            </a:r>
+          </a:p>
+        </p:txBody>
+      </p:sp>
+      <p:sp>
+        <p:nvSpPr>
+          <p:cNvPr id="18" name="TextBox 17"/>
+          <p:cNvSpPr txBox="1"/>
+          <p:nvPr/>
+        </p:nvSpPr>
+        <p:spPr>
+          <a:xfrm>
+            <a:off x="502920" y="1143000"/>
+            <a:ext cx="11155680" cy="914400"/>
+          </a:xfrm>
+          <a:prstGeom prst="rect">
+            <a:avLst/>
+          </a:prstGeom>
+          <a:noFill/>
+        </p:spPr>
+        <p:txBody>
+          <a:bodyPr wrap="square">
+            <a:spAutoFit/>
+          </a:bodyPr>
+          <a:lstStyle/>
           <a:p>
             <a:pPr algn="l">
               <a:lnSpc>
@@ -7760,7 +7689,7 @@
                 </a:solidFill>
                 <a:latin typeface="Meiryo"/>
               </a:rPr>
-              <a:t>壊し方の3要素(いくつ・どの種類・どこ)を確率的に決め、多様な編集パターンを網羅。</a:t>
+              <a:t>ポイント: スペックは特徴ごとに事前に用意(同定プールの平均)— 評価する文からは作らない。</a:t>
             </a:r>
           </a:p>
           <a:p>
@@ -7776,7 +7705,7 @@
                 </a:solidFill>
                 <a:latin typeface="Meiryo"/>
               </a:rPr>
-              <a:t>スペックは壊す前後の文のSAE差分から自動で作る — 人手ラベル不要。</a:t>
+              <a:t>編集器は「どこを・どれだけ直すか」を文とスペックから自分で決める。テキストは凍結LM自身が出す。</a:t>
             </a:r>
           </a:p>
         </p:txBody>
@@ -7876,21 +7805,477 @@
                 </a:solidFill>
                 <a:latin typeface="Meiryo"/>
               </a:rPr>
-              <a:t>学習データと評価データ</a:t>
-            </a:r>
-          </a:p>
-        </p:txBody>
-      </p:sp>
-      <p:sp>
-        <p:nvSpPr>
-          <p:cNvPr id="4" name="TextBox 3"/>
+              <a:t>学習方法 — 4段階(すべて自己教師あり)</a:t>
+            </a:r>
+          </a:p>
+        </p:txBody>
+      </p:sp>
+      <p:sp>
+        <p:nvSpPr>
+          <p:cNvPr id="4" name="Rounded Rectangle 3"/>
+          <p:cNvSpPr/>
+          <p:nvPr/>
+        </p:nvSpPr>
+        <p:spPr>
+          <a:xfrm>
+            <a:off x="457200" y="1554480"/>
+            <a:ext cx="2651760" cy="1920240"/>
+          </a:xfrm>
+          <a:prstGeom prst="roundRect">
+            <a:avLst/>
+          </a:prstGeom>
+          <a:solidFill>
+            <a:srgbClr val="E3F0EC"/>
+          </a:solidFill>
+          <a:ln w="20320">
+            <a:solidFill>
+              <a:srgbClr val="0E7C66"/>
+            </a:solidFill>
+          </a:ln>
+        </p:spPr>
+        <p:style>
+          <a:lnRef idx="1">
+            <a:schemeClr val="accent1"/>
+          </a:lnRef>
+          <a:fillRef idx="3">
+            <a:schemeClr val="accent1"/>
+          </a:fillRef>
+          <a:effectRef idx="2">
+            <a:schemeClr val="accent1"/>
+          </a:effectRef>
+          <a:fontRef idx="minor">
+            <a:schemeClr val="lt1"/>
+          </a:fontRef>
+        </p:style>
+        <p:txBody>
+          <a:bodyPr rtlCol="0" anchor="ctr" wrap="square" lIns="54864" rIns="54864" tIns="36576" bIns="36576"/>
+          <a:lstStyle/>
+          <a:p>
+            <a:pPr algn="ctr"/>
+            <a:r>
+              <a:rPr sz="1200" b="1">
+                <a:solidFill>
+                  <a:srgbClr val="22272E"/>
+                </a:solidFill>
+                <a:latin typeface="Meiryo"/>
+              </a:rPr>
+              <a:t>① LLM2Vec学習</a:t>
+            </a:r>
+          </a:p>
+          <a:p>
+            <a:pPr algn="ctr"/>
+            <a:r>
+              <a:rPr sz="1200" b="1">
+                <a:solidFill>
+                  <a:srgbClr val="22272E"/>
+                </a:solidFill>
+                <a:latin typeface="Meiryo"/>
+              </a:rPr>
+              <a:t>Gemma-2-2Bを双方向</a:t>
+            </a:r>
+          </a:p>
+          <a:p>
+            <a:pPr algn="ctr"/>
+            <a:r>
+              <a:rPr sz="1200" b="1">
+                <a:solidFill>
+                  <a:srgbClr val="22272E"/>
+                </a:solidFill>
+                <a:latin typeface="Meiryo"/>
+              </a:rPr>
+              <a:t>エンコーダ化</a:t>
+            </a:r>
+          </a:p>
+        </p:txBody>
+      </p:sp>
+      <p:cxnSp>
+        <p:nvCxnSpPr>
+          <p:cNvPr id="5" name="Connector 4"/>
+          <p:cNvCxnSpPr/>
+          <p:nvPr/>
+        </p:nvCxnSpPr>
+        <p:spPr>
+          <a:xfrm>
+            <a:off x="3108960" y="2468880"/>
+            <a:ext cx="292608" cy="0"/>
+          </a:xfrm>
+          <a:prstGeom prst="line">
+            <a:avLst/>
+          </a:prstGeom>
+          <a:ln w="27940">
+            <a:solidFill>
+              <a:srgbClr val="5A6472"/>
+            </a:solidFill>
+            <a:tailEnd type="arrow"/>
+          </a:ln>
+        </p:spPr>
+        <p:style>
+          <a:lnRef idx="2">
+            <a:schemeClr val="accent1"/>
+          </a:lnRef>
+          <a:fillRef idx="0">
+            <a:schemeClr val="accent1"/>
+          </a:fillRef>
+          <a:effectRef idx="1">
+            <a:schemeClr val="accent1"/>
+          </a:effectRef>
+          <a:fontRef idx="minor">
+            <a:schemeClr val="tx1"/>
+          </a:fontRef>
+        </p:style>
+      </p:cxnSp>
+      <p:sp>
+        <p:nvSpPr>
+          <p:cNvPr id="6" name="Rounded Rectangle 5"/>
+          <p:cNvSpPr/>
+          <p:nvPr/>
+        </p:nvSpPr>
+        <p:spPr>
+          <a:xfrm>
+            <a:off x="3429000" y="1554480"/>
+            <a:ext cx="3108960" cy="1920240"/>
+          </a:xfrm>
+          <a:prstGeom prst="roundRect">
+            <a:avLst/>
+          </a:prstGeom>
+          <a:solidFill>
+            <a:srgbClr val="EDF0F5"/>
+          </a:solidFill>
+          <a:ln w="20320">
+            <a:solidFill>
+              <a:srgbClr val="5E6E8C"/>
+            </a:solidFill>
+          </a:ln>
+        </p:spPr>
+        <p:style>
+          <a:lnRef idx="1">
+            <a:schemeClr val="accent1"/>
+          </a:lnRef>
+          <a:fillRef idx="3">
+            <a:schemeClr val="accent1"/>
+          </a:fillRef>
+          <a:effectRef idx="2">
+            <a:schemeClr val="accent1"/>
+          </a:effectRef>
+          <a:fontRef idx="minor">
+            <a:schemeClr val="lt1"/>
+          </a:fontRef>
+        </p:style>
+        <p:txBody>
+          <a:bodyPr rtlCol="0" anchor="ctr" wrap="square" lIns="54864" rIns="54864" tIns="36576" bIns="36576"/>
+          <a:lstStyle/>
+          <a:p>
+            <a:pPr algn="ctr"/>
+            <a:r>
+              <a:rPr sz="1200" b="1">
+                <a:solidFill>
+                  <a:srgbClr val="22272E"/>
+                </a:solidFill>
+                <a:latin typeface="Meiryo"/>
+              </a:rPr>
+              <a:t>② 合成データ作成</a:t>
+            </a:r>
+          </a:p>
+          <a:p>
+            <a:pPr algn="ctr"/>
+            <a:r>
+              <a:rPr sz="1200" b="1">
+                <a:solidFill>
+                  <a:srgbClr val="22272E"/>
+                </a:solidFill>
+                <a:latin typeface="Meiryo"/>
+              </a:rPr>
+              <a:t>きれいな文をわざと壊す</a:t>
+            </a:r>
+          </a:p>
+          <a:p>
+            <a:pPr algn="ctr"/>
+            <a:r>
+              <a:rPr sz="1200" b="1">
+                <a:solidFill>
+                  <a:srgbClr val="22272E"/>
+                </a:solidFill>
+                <a:latin typeface="Meiryo"/>
+              </a:rPr>
+              <a:t>個数=幾何分布/種類=重み付き抽選</a:t>
+            </a:r>
+          </a:p>
+          <a:p>
+            <a:pPr algn="ctr"/>
+            <a:r>
+              <a:rPr sz="1200" b="1">
+                <a:solidFill>
+                  <a:srgbClr val="22272E"/>
+                </a:solidFill>
+                <a:latin typeface="Meiryo"/>
+              </a:rPr>
+              <a:t>場所=削除は壊れにくい語優先</a:t>
+            </a:r>
+          </a:p>
+          <a:p>
+            <a:pPr algn="ctr"/>
+            <a:r>
+              <a:rPr sz="1200" b="1">
+                <a:solidFill>
+                  <a:srgbClr val="22272E"/>
+                </a:solidFill>
+                <a:latin typeface="Meiryo"/>
+              </a:rPr>
+              <a:t>①のモデルで自然さを採点し選別</a:t>
+            </a:r>
+          </a:p>
+        </p:txBody>
+      </p:sp>
+      <p:cxnSp>
+        <p:nvCxnSpPr>
+          <p:cNvPr id="7" name="Connector 6"/>
+          <p:cNvCxnSpPr/>
+          <p:nvPr/>
+        </p:nvCxnSpPr>
+        <p:spPr>
+          <a:xfrm>
+            <a:off x="6537960" y="2468880"/>
+            <a:ext cx="292608" cy="0"/>
+          </a:xfrm>
+          <a:prstGeom prst="line">
+            <a:avLst/>
+          </a:prstGeom>
+          <a:ln w="27940">
+            <a:solidFill>
+              <a:srgbClr val="5A6472"/>
+            </a:solidFill>
+            <a:tailEnd type="arrow"/>
+          </a:ln>
+        </p:spPr>
+        <p:style>
+          <a:lnRef idx="2">
+            <a:schemeClr val="accent1"/>
+          </a:lnRef>
+          <a:fillRef idx="0">
+            <a:schemeClr val="accent1"/>
+          </a:fillRef>
+          <a:effectRef idx="1">
+            <a:schemeClr val="accent1"/>
+          </a:effectRef>
+          <a:fontRef idx="minor">
+            <a:schemeClr val="tx1"/>
+          </a:fontRef>
+        </p:style>
+      </p:cxnSp>
+      <p:sp>
+        <p:nvSpPr>
+          <p:cNvPr id="8" name="Rounded Rectangle 7"/>
+          <p:cNvSpPr/>
+          <p:nvPr/>
+        </p:nvSpPr>
+        <p:spPr>
+          <a:xfrm>
+            <a:off x="6858000" y="1554480"/>
+            <a:ext cx="2651760" cy="1920240"/>
+          </a:xfrm>
+          <a:prstGeom prst="roundRect">
+            <a:avLst/>
+          </a:prstGeom>
+          <a:solidFill>
+            <a:srgbClr val="E3F0EC"/>
+          </a:solidFill>
+          <a:ln w="20320">
+            <a:solidFill>
+              <a:srgbClr val="0E7C66"/>
+            </a:solidFill>
+          </a:ln>
+        </p:spPr>
+        <p:style>
+          <a:lnRef idx="1">
+            <a:schemeClr val="accent1"/>
+          </a:lnRef>
+          <a:fillRef idx="3">
+            <a:schemeClr val="accent1"/>
+          </a:fillRef>
+          <a:effectRef idx="2">
+            <a:schemeClr val="accent1"/>
+          </a:effectRef>
+          <a:fontRef idx="minor">
+            <a:schemeClr val="lt1"/>
+          </a:fontRef>
+        </p:style>
+        <p:txBody>
+          <a:bodyPr rtlCol="0" anchor="ctr" wrap="square" lIns="54864" rIns="54864" tIns="36576" bIns="36576"/>
+          <a:lstStyle/>
+          <a:p>
+            <a:pPr algn="ctr"/>
+            <a:r>
+              <a:rPr sz="1200" b="1">
+                <a:solidFill>
+                  <a:srgbClr val="22272E"/>
+                </a:solidFill>
+                <a:latin typeface="Meiryo"/>
+              </a:rPr>
+              <a:t>③ EF基盤の学習</a:t>
+            </a:r>
+          </a:p>
+          <a:p>
+            <a:pPr algn="ctr"/>
+            <a:r>
+              <a:rPr sz="1200" b="1">
+                <a:solidFill>
+                  <a:srgbClr val="22272E"/>
+                </a:solidFill>
+                <a:latin typeface="Meiryo"/>
+              </a:rPr>
+              <a:t>壊れた文→元の文へ戻す</a:t>
+            </a:r>
+          </a:p>
+          <a:p>
+            <a:pPr algn="ctr"/>
+            <a:r>
+              <a:rPr sz="1200" b="1">
+                <a:solidFill>
+                  <a:srgbClr val="22272E"/>
+                </a:solidFill>
+                <a:latin typeface="Meiryo"/>
+              </a:rPr>
+              <a:t>編集操作(挿入/削除/置換)を学習</a:t>
+            </a:r>
+          </a:p>
+        </p:txBody>
+      </p:sp>
+      <p:cxnSp>
+        <p:nvCxnSpPr>
+          <p:cNvPr id="9" name="Connector 8"/>
+          <p:cNvCxnSpPr/>
+          <p:nvPr/>
+        </p:nvCxnSpPr>
+        <p:spPr>
+          <a:xfrm>
+            <a:off x="9509760" y="2468880"/>
+            <a:ext cx="292608" cy="0"/>
+          </a:xfrm>
+          <a:prstGeom prst="line">
+            <a:avLst/>
+          </a:prstGeom>
+          <a:ln w="27940">
+            <a:solidFill>
+              <a:srgbClr val="5A6472"/>
+            </a:solidFill>
+            <a:tailEnd type="arrow"/>
+          </a:ln>
+        </p:spPr>
+        <p:style>
+          <a:lnRef idx="2">
+            <a:schemeClr val="accent1"/>
+          </a:lnRef>
+          <a:fillRef idx="0">
+            <a:schemeClr val="accent1"/>
+          </a:fillRef>
+          <a:effectRef idx="1">
+            <a:schemeClr val="accent1"/>
+          </a:effectRef>
+          <a:fontRef idx="minor">
+            <a:schemeClr val="tx1"/>
+          </a:fontRef>
+        </p:style>
+      </p:cxnSp>
+      <p:sp>
+        <p:nvSpPr>
+          <p:cNvPr id="10" name="Rounded Rectangle 9"/>
+          <p:cNvSpPr/>
+          <p:nvPr/>
+        </p:nvSpPr>
+        <p:spPr>
+          <a:xfrm>
+            <a:off x="9829800" y="1554480"/>
+            <a:ext cx="2651760" cy="1920240"/>
+          </a:xfrm>
+          <a:prstGeom prst="roundRect">
+            <a:avLst/>
+          </a:prstGeom>
+          <a:solidFill>
+            <a:srgbClr val="E3F0EC"/>
+          </a:solidFill>
+          <a:ln w="20320">
+            <a:solidFill>
+              <a:srgbClr val="0E7C66"/>
+            </a:solidFill>
+          </a:ln>
+        </p:spPr>
+        <p:style>
+          <a:lnRef idx="1">
+            <a:schemeClr val="accent1"/>
+          </a:lnRef>
+          <a:fillRef idx="3">
+            <a:schemeClr val="accent1"/>
+          </a:fillRef>
+          <a:effectRef idx="2">
+            <a:schemeClr val="accent1"/>
+          </a:effectRef>
+          <a:fontRef idx="minor">
+            <a:schemeClr val="lt1"/>
+          </a:fontRef>
+        </p:style>
+        <p:txBody>
+          <a:bodyPr rtlCol="0" anchor="ctr" wrap="square" lIns="54864" rIns="54864" tIns="36576" bIns="36576"/>
+          <a:lstStyle/>
+          <a:p>
+            <a:pPr algn="ctr"/>
+            <a:r>
+              <a:rPr sz="1200" b="1">
+                <a:solidFill>
+                  <a:srgbClr val="22272E"/>
+                </a:solidFill>
+                <a:latin typeface="Meiryo"/>
+              </a:rPr>
+              <a:t>④ 最終編集器</a:t>
+            </a:r>
+          </a:p>
+          <a:p>
+            <a:pPr algn="ctr"/>
+            <a:r>
+              <a:rPr sz="1200" b="1">
+                <a:solidFill>
+                  <a:srgbClr val="22272E"/>
+                </a:solidFill>
+                <a:latin typeface="Meiryo"/>
+              </a:rPr>
+              <a:t>出力をΔhに付け替え</a:t>
+            </a:r>
+          </a:p>
+          <a:p>
+            <a:pPr algn="ctr"/>
+            <a:r>
+              <a:rPr sz="1200" b="1">
+                <a:solidFill>
+                  <a:srgbClr val="22272E"/>
+                </a:solidFill>
+                <a:latin typeface="Meiryo"/>
+              </a:rPr>
+              <a:t>凍結LM越しの損失で学習</a:t>
+            </a:r>
+          </a:p>
+          <a:p>
+            <a:pPr algn="ctr"/>
+            <a:r>
+              <a:rPr sz="1200" b="1">
+                <a:solidFill>
+                  <a:srgbClr val="22272E"/>
+                </a:solidFill>
+                <a:latin typeface="Meiryo"/>
+              </a:rPr>
+              <a:t>(スペック誤り時は「編集しない」も教師)</a:t>
+            </a:r>
+          </a:p>
+        </p:txBody>
+      </p:sp>
+      <p:sp>
+        <p:nvSpPr>
+          <p:cNvPr id="11" name="TextBox 10"/>
           <p:cNvSpPr txBox="1"/>
           <p:nvPr/>
         </p:nvSpPr>
         <p:spPr>
           <a:xfrm>
-            <a:off x="640080" y="1143000"/>
-            <a:ext cx="10972800" cy="5394960"/>
+            <a:off x="502920" y="3931920"/>
+            <a:ext cx="11155680" cy="1463040"/>
           </a:xfrm>
           <a:prstGeom prst="rect">
             <a:avLst/>
@@ -7903,134 +8288,51 @@
           </a:bodyPr>
           <a:lstStyle/>
           <a:p>
-            <a:pPr>
+            <a:pPr algn="l">
               <a:lnSpc>
-                <a:spcPct val="116000"/>
+                <a:spcPct val="115000"/>
               </a:lnSpc>
-              <a:spcAft>
-                <a:spcPts val="800"/>
-              </a:spcAft>
             </a:pPr>
             <a:r>
-              <a:rPr sz="1800" b="1">
-                <a:solidFill>
-                  <a:srgbClr val="0E7C66"/>
-                </a:solidFill>
-                <a:latin typeface="Meiryo"/>
-              </a:rPr>
-              <a:t>学習データ: </a:t>
-            </a:r>
-            <a:r>
-              <a:rPr sz="1800">
-                <a:solidFill>
-                  <a:srgbClr val="22272E"/>
-                </a:solidFill>
-                <a:latin typeface="Meiryo"/>
-              </a:rPr>
-              <a:t>合成データのみ(コーパスの文を確率的に壊す→直す)。LinguaLens-Dataは不使用</a:t>
-            </a:r>
-          </a:p>
-          <a:p>
-            <a:pPr>
+              <a:rPr sz="1500" b="0">
+                <a:solidFill>
+                  <a:srgbClr val="5A6472"/>
+                </a:solidFill>
+                <a:latin typeface="Meiryo"/>
+              </a:rPr>
+              <a:t>学習にLinguaLens-Dataは一切使わない(ゼロショット転移)。</a:t>
+            </a:r>
+          </a:p>
+          <a:p>
+            <a:pPr algn="l">
               <a:lnSpc>
-                <a:spcPct val="116000"/>
+                <a:spcPct val="115000"/>
               </a:lnSpc>
-              <a:spcAft>
-                <a:spcPts val="800"/>
-              </a:spcAft>
             </a:pPr>
             <a:r>
-              <a:rPr sz="1800" b="1">
-                <a:solidFill>
-                  <a:srgbClr val="0E7C66"/>
-                </a:solidFill>
-                <a:latin typeface="Meiryo"/>
-              </a:rPr>
-              <a:t>評価データ: </a:t>
-            </a:r>
-            <a:r>
-              <a:rPr sz="1800">
-                <a:solidFill>
-                  <a:srgbClr val="22272E"/>
-                </a:solidFill>
-                <a:latin typeface="Meiryo"/>
-              </a:rPr>
-              <a:t>LinguaLens-Data(英語99特徴 × 約50最小対 = 4,951ペア)</a:t>
-            </a:r>
-          </a:p>
-          <a:p>
-            <a:pPr>
+              <a:rPr sz="1500" b="0">
+                <a:solidFill>
+                  <a:srgbClr val="5A6472"/>
+                </a:solidFill>
+                <a:latin typeface="Meiryo"/>
+              </a:rPr>
+              <a:t>壊し方の3要素(いくつ・どの種類・どこ)を確率的に決め、多様な編集パターンを網羅。</a:t>
+            </a:r>
+          </a:p>
+          <a:p>
+            <a:pPr algn="l">
               <a:lnSpc>
-                <a:spcPct val="116000"/>
+                <a:spcPct val="115000"/>
               </a:lnSpc>
-              <a:spcAft>
-                <a:spcPts val="800"/>
-              </a:spcAft>
             </a:pPr>
             <a:r>
-              <a:rPr sz="1800" b="1">
-                <a:solidFill>
-                  <a:srgbClr val="0E7C66"/>
-                </a:solidFill>
-                <a:latin typeface="Meiryo"/>
-              </a:rPr>
-              <a:t>データ分割(重要): </a:t>
-            </a:r>
-            <a:r>
-              <a:rPr sz="1800">
-                <a:solidFill>
-                  <a:srgbClr val="22272E"/>
-                </a:solidFill>
-                <a:latin typeface="Meiryo"/>
-              </a:rPr>
-              <a:t>評価500ペア / 活性の特定(同定)プール4,451ペアに固定分割</a:t>
-            </a:r>
-          </a:p>
-          <a:p>
-            <a:pPr lvl="1">
-              <a:lnSpc>
-                <a:spcPct val="116000"/>
-              </a:lnSpc>
-              <a:spcAft>
-                <a:spcPts val="800"/>
-              </a:spcAft>
-            </a:pPr>
-            <a:r>
-              <a:rPr sz="1600">
+              <a:rPr sz="1500" b="0">
                 <a:solidFill>
                   <a:srgbClr val="5A6472"/>
                 </a:solidFill>
                 <a:latin typeface="Meiryo"/>
               </a:rPr>
-              <a:t>スペックは同定プールだけから作る → 評価する文もその正解も、スペックに一切漏れない。LinguaLens原法は全ペアで同定+同じデータで検証しており、この分離がない(我々の改良点)</a:t>
-            </a:r>
-          </a:p>
-          <a:p>
-            <a:pPr>
-              <a:lnSpc>
-                <a:spcPct val="116000"/>
-              </a:lnSpc>
-              <a:spcAft>
-                <a:spcPts val="800"/>
-              </a:spcAft>
-            </a:pPr>
-            <a:r>
-              <a:rPr sz="1800" b="1">
-                <a:solidFill>
-                  <a:srgbClr val="0E7C66"/>
-                </a:solidFill>
-                <a:latin typeface="Meiryo"/>
-              </a:rPr>
-              <a:t>方向: </a:t>
-            </a:r>
-            <a:r>
-              <a:rPr sz="1800">
-                <a:solidFill>
-                  <a:srgbClr val="22272E"/>
-                </a:solidFill>
-                <a:latin typeface="Meiryo"/>
-              </a:rPr>
-              <a:t>各最小対は「特徴を消す(sup)」「特徴を足す(amp)」の両方向で評価できる(逆向き変換)</a:t>
+              <a:t>スペックは壊す前後の文のSAE差分から自動で作る — 人手ラベル不要。</a:t>
             </a:r>
           </a:p>
         </p:txBody>
@@ -8130,7 +8432,7 @@
                 </a:solidFill>
                 <a:latin typeface="Meiryo"/>
               </a:rPr>
-              <a:t>評価方法 — exact と FIC</a:t>
+              <a:t>学習データと評価データ</a:t>
             </a:r>
           </a:p>
         </p:txBody>
@@ -8172,7 +8474,7 @@
                 </a:solidFill>
                 <a:latin typeface="Meiryo"/>
               </a:rPr>
-              <a:t>exact(厳密一致): </a:t>
+              <a:t>学習データ: </a:t>
             </a:r>
             <a:r>
               <a:rPr sz="1800">
@@ -8181,7 +8483,7 @@
                 </a:solidFill>
                 <a:latin typeface="Meiryo"/>
               </a:rPr>
-              <a:t>「この文を復唱せよ」というプロンプト下で介入し、出力が正解文(最小対のもう片方)と完全一致した率。編集の精密さを測る</a:t>
+              <a:t>合成データのみ(コーパスの文を確率的に壊す→直す)。LinguaLens-Dataは不使用</a:t>
             </a:r>
           </a:p>
           <a:p>
@@ -8200,7 +8502,7 @@
                 </a:solidFill>
                 <a:latin typeface="Meiryo"/>
               </a:rPr>
-              <a:t>FIC(LinguaLensの指標): </a:t>
+              <a:t>評価データ: </a:t>
             </a:r>
             <a:r>
               <a:rPr sz="1800">
@@ -8209,7 +8511,7 @@
                 </a:solidFill>
                 <a:latin typeface="Meiryo"/>
               </a:rPr>
-              <a:t>介入ありの生成が、介入なしと比べて対象の特徴を「より多く/より少なく」示すかをGPT-4oが判定。特徴の増減の因果効果を測る</a:t>
+              <a:t>LinguaLens-Data(英語99特徴 × 約50最小対 = 4,951ペア)</a:t>
             </a:r>
           </a:p>
           <a:p>
@@ -8228,7 +8530,7 @@
                 </a:solidFill>
                 <a:latin typeface="Meiryo"/>
               </a:rPr>
-              <a:t>活性の特定はfeature単位: </a:t>
+              <a:t>データ分割(重要): </a:t>
             </a:r>
             <a:r>
               <a:rPr sz="1800">
@@ -8237,7 +8539,26 @@
                 </a:solidFill>
                 <a:latin typeface="Meiryo"/>
               </a:rPr>
-              <a:t>特徴ごとに同定プール約45ペアの平均から上位64活性を選ぶ(評価文ごとには作らない)</a:t>
+              <a:t>評価500ペア / 活性の特定(同定)プール4,451ペアに固定分割</a:t>
+            </a:r>
+          </a:p>
+          <a:p>
+            <a:pPr lvl="1">
+              <a:lnSpc>
+                <a:spcPct val="116000"/>
+              </a:lnSpc>
+              <a:spcAft>
+                <a:spcPts val="800"/>
+              </a:spcAft>
+            </a:pPr>
+            <a:r>
+              <a:rPr sz="1600">
+                <a:solidFill>
+                  <a:srgbClr val="5A6472"/>
+                </a:solidFill>
+                <a:latin typeface="Meiryo"/>
+              </a:rPr>
+              <a:t>スペックは同定プールだけから作る → 評価する文もその正解も、スペックに一切漏れない。LinguaLens原法は全ペアで同定+同じデータで検証しており、この分離がない(我々の改良点)</a:t>
             </a:r>
           </a:p>
           <a:p>
@@ -8256,7 +8577,7 @@
                 </a:solidFill>
                 <a:latin typeface="Meiryo"/>
               </a:rPr>
-              <a:t>集計軸: </a:t>
+              <a:t>方向: </a:t>
             </a:r>
             <a:r>
               <a:rPr sz="1800">
@@ -8265,35 +8586,7 @@
                 </a:solidFill>
                 <a:latin typeface="Meiryo"/>
               </a:rPr>
-              <a:t>方向2分類(amp=足す / sup=消す)× 特徴4分類(形態・統語・意味・語用)</a:t>
-            </a:r>
-          </a:p>
-          <a:p>
-            <a:pPr>
-              <a:lnSpc>
-                <a:spcPct val="116000"/>
-              </a:lnSpc>
-              <a:spcAft>
-                <a:spcPts val="800"/>
-              </a:spcAft>
-            </a:pPr>
-            <a:r>
-              <a:rPr sz="1800" b="1">
-                <a:solidFill>
-                  <a:srgbClr val="0E7C66"/>
-                </a:solidFill>
-                <a:latin typeface="Meiryo"/>
-              </a:rPr>
-              <a:t>統制: </a:t>
-            </a:r>
-            <a:r>
-              <a:rPr sz="1800">
-                <a:solidFill>
-                  <a:srgbClr val="22272E"/>
-                </a:solidFill>
-                <a:latin typeface="Meiryo"/>
-              </a:rPr>
-              <a:t>スペックを無作為に差し替えたrandom条件・空にしたempty条件を常に併記(「介入の中身に従っているか」の検算)</a:t>
+              <a:t>各最小対は「特徴を消す(sup)」「特徴を足す(amp)」の両方向で評価できる(逆向き変換)</a:t>
             </a:r>
           </a:p>
         </p:txBody>

--- a/slides/20260722_progress.pptx
+++ b/slides/20260722_progress.pptx
@@ -19,6 +19,7 @@
     <p:sldId id="267" r:id="rId18"/>
     <p:sldId id="268" r:id="rId19"/>
     <p:sldId id="269" r:id="rId20"/>
+    <p:sldId id="270" r:id="rId21"/>
   </p:sldIdLst>
   <p:sldSz cx="12191695" cy="6858000" type="screen4x3"/>
   <p:notesSz cx="6858000" cy="9144000"/>
@@ -5492,6 +5493,578 @@
                 </a:solidFill>
                 <a:latin typeface="Meiryo"/>
               </a:rPr>
+              <a:t>失敗例 — promptingのFICはなぜ低いか</a:t>
+            </a:r>
+          </a:p>
+        </p:txBody>
+      </p:sp>
+      <p:sp>
+        <p:nvSpPr>
+          <p:cNvPr id="4" name="TextBox 3"/>
+          <p:cNvSpPr txBox="1"/>
+          <p:nvPr/>
+        </p:nvSpPr>
+        <p:spPr>
+          <a:xfrm>
+            <a:off x="502920" y="1051560"/>
+            <a:ext cx="11247120" cy="685800"/>
+          </a:xfrm>
+          <a:prstGeom prst="rect">
+            <a:avLst/>
+          </a:prstGeom>
+          <a:noFill/>
+        </p:spPr>
+        <p:txBody>
+          <a:bodyPr wrap="square">
+            <a:spAutoFit/>
+          </a:bodyPr>
+          <a:lstStyle/>
+          <a:p>
+            <a:pPr algn="l">
+              <a:lnSpc>
+                <a:spcPct val="115000"/>
+              </a:lnSpc>
+            </a:pPr>
+            <a:r>
+              <a:rPr sz="1500" b="0">
+                <a:solidFill>
+                  <a:srgbClr val="5A6472"/>
+                </a:solidFill>
+                <a:latin typeface="Meiryo"/>
+              </a:rPr>
+              <a:t>FICは「正しい指定のときだけ特徴が動くか」を測る(間違った指定でも動くと減点)。promptingは指示が間違っていても編集してしまうため、exactが高くてもFICが下がる。</a:t>
+            </a:r>
+          </a:p>
+        </p:txBody>
+      </p:sp>
+      <p:sp>
+        <p:nvSpPr>
+          <p:cNvPr id="5" name="TextBox 4"/>
+          <p:cNvSpPr txBox="1"/>
+          <p:nvPr/>
+        </p:nvSpPr>
+        <p:spPr>
+          <a:xfrm>
+            <a:off x="502920" y="1828800"/>
+            <a:ext cx="5577840" cy="365760"/>
+          </a:xfrm>
+          <a:prstGeom prst="rect">
+            <a:avLst/>
+          </a:prstGeom>
+          <a:noFill/>
+        </p:spPr>
+        <p:txBody>
+          <a:bodyPr wrap="square">
+            <a:spAutoFit/>
+          </a:bodyPr>
+          <a:lstStyle/>
+          <a:p>
+            <a:pPr algn="l">
+              <a:lnSpc>
+                <a:spcPct val="115000"/>
+              </a:lnSpc>
+            </a:pPr>
+            <a:r>
+              <a:rPr sz="1600" b="1">
+                <a:solidFill>
+                  <a:srgbClr val="5E6E8C"/>
+                </a:solidFill>
+                <a:latin typeface="Meiryo"/>
+              </a:rPr>
+              <a:t>prompting: 無関係な特徴の指示でも消してしまう</a:t>
+            </a:r>
+          </a:p>
+        </p:txBody>
+      </p:sp>
+      <p:sp>
+        <p:nvSpPr>
+          <p:cNvPr id="6" name="Rounded Rectangle 5"/>
+          <p:cNvSpPr/>
+          <p:nvPr/>
+        </p:nvSpPr>
+        <p:spPr>
+          <a:xfrm>
+            <a:off x="502920" y="2286000"/>
+            <a:ext cx="5577840" cy="2834640"/>
+          </a:xfrm>
+          <a:prstGeom prst="roundRect">
+            <a:avLst/>
+          </a:prstGeom>
+          <a:solidFill>
+            <a:srgbClr val="F6F7F8"/>
+          </a:solidFill>
+          <a:ln w="20320">
+            <a:solidFill>
+              <a:srgbClr val="5E6E8C"/>
+            </a:solidFill>
+          </a:ln>
+        </p:spPr>
+        <p:style>
+          <a:lnRef idx="1">
+            <a:schemeClr val="accent1"/>
+          </a:lnRef>
+          <a:fillRef idx="3">
+            <a:schemeClr val="accent1"/>
+          </a:fillRef>
+          <a:effectRef idx="2">
+            <a:schemeClr val="accent1"/>
+          </a:effectRef>
+          <a:fontRef idx="minor">
+            <a:schemeClr val="lt1"/>
+          </a:fontRef>
+        </p:style>
+        <p:txBody>
+          <a:bodyPr rtlCol="0" anchor="ctr" wrap="square" lIns="54864" rIns="54864" tIns="36576" bIns="36576"/>
+          <a:lstStyle/>
+          <a:p>
+            <a:pPr algn="ctr"/>
+            <a:r>
+              <a:rPr sz="1200" b="0">
+                <a:solidFill>
+                  <a:srgbClr val="22272E"/>
+                </a:solidFill>
+                <a:latin typeface="Meiryo"/>
+              </a:rPr>
+              <a:t>src:  He is the most respectful student here.</a:t>
+            </a:r>
+          </a:p>
+          <a:p>
+            <a:pPr algn="ctr"/>
+            <a:r>
+              <a:rPr sz="1200" b="0">
+                <a:solidFill>
+                  <a:srgbClr val="22272E"/>
+                </a:solidFill>
+                <a:latin typeface="Meiryo"/>
+              </a:rPr>
+              <a:t>無関係指示: → He is the respectful student here.</a:t>
+            </a:r>
+          </a:p>
+          <a:p>
+            <a:pPr algn="ctr"/>
+            <a:r>
+              <a:rPr sz="1200" b="0">
+                <a:solidFill>
+                  <a:srgbClr val="22272E"/>
+                </a:solidFill>
+                <a:latin typeface="Meiryo"/>
+              </a:rPr>
+              <a:t>(頼んでいない最上級が消える=正解と同じ編集)</a:t>
+            </a:r>
+          </a:p>
+          <a:p>
+            <a:pPr algn="ctr"/>
+            <a:r>
+              <a:rPr sz="1200" b="0">
+                <a:solidFill>
+                  <a:srgbClr val="22272E"/>
+                </a:solidFill>
+                <a:latin typeface="Meiryo"/>
+              </a:rPr>
+              <a:t/>
+            </a:r>
+          </a:p>
+          <a:p>
+            <a:pPr algn="ctr"/>
+            <a:r>
+              <a:rPr sz="1200" b="0">
+                <a:solidFill>
+                  <a:srgbClr val="22272E"/>
+                </a:solidFill>
+                <a:latin typeface="Meiryo"/>
+              </a:rPr>
+              <a:t>src:  May I interject, the mobile app needs …</a:t>
+            </a:r>
+          </a:p>
+          <a:p>
+            <a:pPr algn="ctr"/>
+            <a:r>
+              <a:rPr sz="1200" b="0">
+                <a:solidFill>
+                  <a:srgbClr val="22272E"/>
+                </a:solidFill>
+                <a:latin typeface="Meiryo"/>
+              </a:rPr>
+              <a:t>無関係指示: → The mobile app needs …(間投句が消える)</a:t>
+            </a:r>
+          </a:p>
+          <a:p>
+            <a:pPr algn="ctr"/>
+            <a:r>
+              <a:rPr sz="1200" b="0">
+                <a:solidFill>
+                  <a:srgbClr val="22272E"/>
+                </a:solidFill>
+                <a:latin typeface="Meiryo"/>
+              </a:rPr>
+              <a:t/>
+            </a:r>
+          </a:p>
+          <a:p>
+            <a:pPr algn="ctr"/>
+            <a:r>
+              <a:rPr sz="1200" b="0">
+                <a:solidFill>
+                  <a:srgbClr val="22272E"/>
+                </a:solidFill>
+                <a:latin typeface="Meiryo"/>
+              </a:rPr>
+              <a:t>src:  He wanted to slowly walk through …</a:t>
+            </a:r>
+          </a:p>
+          <a:p>
+            <a:pPr algn="ctr"/>
+            <a:r>
+              <a:rPr sz="1200" b="0">
+                <a:solidFill>
+                  <a:srgbClr val="22272E"/>
+                </a:solidFill>
+                <a:latin typeface="Meiryo"/>
+              </a:rPr>
+              <a:t>無関係指示: → He wanted to leisurely explore …(大幅書換)</a:t>
+            </a:r>
+          </a:p>
+        </p:txBody>
+      </p:sp>
+      <p:sp>
+        <p:nvSpPr>
+          <p:cNvPr id="7" name="TextBox 6"/>
+          <p:cNvSpPr txBox="1"/>
+          <p:nvPr/>
+        </p:nvSpPr>
+        <p:spPr>
+          <a:xfrm>
+            <a:off x="6355080" y="1828800"/>
+            <a:ext cx="5486400" cy="365760"/>
+          </a:xfrm>
+          <a:prstGeom prst="rect">
+            <a:avLst/>
+          </a:prstGeom>
+          <a:noFill/>
+        </p:spPr>
+        <p:txBody>
+          <a:bodyPr wrap="square">
+            <a:spAutoFit/>
+          </a:bodyPr>
+          <a:lstStyle/>
+          <a:p>
+            <a:pPr algn="l">
+              <a:lnSpc>
+                <a:spcPct val="115000"/>
+              </a:lnSpc>
+            </a:pPr>
+            <a:r>
+              <a:rPr sz="1600" b="1">
+                <a:solidFill>
+                  <a:srgbClr val="0E7C66"/>
+                </a:solidFill>
+                <a:latin typeface="Meiryo"/>
+              </a:rPr>
+              <a:t>本手法: 正しいスペックでも編集が出ないことがある</a:t>
+            </a:r>
+          </a:p>
+        </p:txBody>
+      </p:sp>
+      <p:sp>
+        <p:nvSpPr>
+          <p:cNvPr id="8" name="Rounded Rectangle 7"/>
+          <p:cNvSpPr/>
+          <p:nvPr/>
+        </p:nvSpPr>
+        <p:spPr>
+          <a:xfrm>
+            <a:off x="6355080" y="2286000"/>
+            <a:ext cx="5394960" cy="2834640"/>
+          </a:xfrm>
+          <a:prstGeom prst="roundRect">
+            <a:avLst/>
+          </a:prstGeom>
+          <a:solidFill>
+            <a:srgbClr val="F6F7F8"/>
+          </a:solidFill>
+          <a:ln w="20320">
+            <a:solidFill>
+              <a:srgbClr val="0E7C66"/>
+            </a:solidFill>
+          </a:ln>
+        </p:spPr>
+        <p:style>
+          <a:lnRef idx="1">
+            <a:schemeClr val="accent1"/>
+          </a:lnRef>
+          <a:fillRef idx="3">
+            <a:schemeClr val="accent1"/>
+          </a:fillRef>
+          <a:effectRef idx="2">
+            <a:schemeClr val="accent1"/>
+          </a:effectRef>
+          <a:fontRef idx="minor">
+            <a:schemeClr val="lt1"/>
+          </a:fontRef>
+        </p:style>
+        <p:txBody>
+          <a:bodyPr rtlCol="0" anchor="ctr" wrap="square" lIns="54864" rIns="54864" tIns="36576" bIns="36576"/>
+          <a:lstStyle/>
+          <a:p>
+            <a:pPr algn="ctr"/>
+            <a:r>
+              <a:rPr sz="1200" b="0">
+                <a:solidFill>
+                  <a:srgbClr val="22272E"/>
+                </a:solidFill>
+                <a:latin typeface="Meiryo"/>
+              </a:rPr>
+              <a:t>src:  He is the most respectful student here.</a:t>
+            </a:r>
+          </a:p>
+          <a:p>
+            <a:pPr algn="ctr"/>
+            <a:r>
+              <a:rPr sz="1200" b="0">
+                <a:solidFill>
+                  <a:srgbClr val="22272E"/>
+                </a:solidFill>
+                <a:latin typeface="Meiryo"/>
+              </a:rPr>
+              <a:t>出力 = src のまま(最上級を消せず)</a:t>
+            </a:r>
+          </a:p>
+          <a:p>
+            <a:pPr algn="ctr"/>
+            <a:r>
+              <a:rPr sz="1200" b="0">
+                <a:solidFill>
+                  <a:srgbClr val="22272E"/>
+                </a:solidFill>
+                <a:latin typeface="Meiryo"/>
+              </a:rPr>
+              <a:t/>
+            </a:r>
+          </a:p>
+          <a:p>
+            <a:pPr algn="ctr"/>
+            <a:r>
+              <a:rPr sz="1200" b="0">
+                <a:solidFill>
+                  <a:srgbClr val="22272E"/>
+                </a:solidFill>
+                <a:latin typeface="Meiryo"/>
+              </a:rPr>
+              <a:t>src:  A clock ticks without pause.</a:t>
+            </a:r>
+          </a:p>
+          <a:p>
+            <a:pPr algn="ctr"/>
+            <a:r>
+              <a:rPr sz="1200" b="0">
+                <a:solidFill>
+                  <a:srgbClr val="22272E"/>
+                </a:solidFill>
+                <a:latin typeface="Meiryo"/>
+              </a:rPr>
+              <a:t>出力 = src のまま(without pauseを削除できず)</a:t>
+            </a:r>
+          </a:p>
+          <a:p>
+            <a:pPr algn="ctr"/>
+            <a:r>
+              <a:rPr sz="1200" b="0">
+                <a:solidFill>
+                  <a:srgbClr val="22272E"/>
+                </a:solidFill>
+                <a:latin typeface="Meiryo"/>
+              </a:rPr>
+              <a:t/>
+            </a:r>
+          </a:p>
+          <a:p>
+            <a:pPr algn="ctr"/>
+            <a:r>
+              <a:rPr sz="1200" b="0">
+                <a:solidFill>
+                  <a:srgbClr val="22272E"/>
+                </a:solidFill>
+                <a:latin typeface="Meiryo"/>
+              </a:rPr>
+              <a:t>src:  Biologists studied green slime in …</a:t>
+            </a:r>
+          </a:p>
+          <a:p>
+            <a:pPr algn="ctr"/>
+            <a:r>
+              <a:rPr sz="1200" b="0">
+                <a:solidFill>
+                  <a:srgbClr val="22272E"/>
+                </a:solidFill>
+                <a:latin typeface="Meiryo"/>
+              </a:rPr>
+              <a:t>出力 = src のまま(algaeへの語彙置換 —</a:t>
+            </a:r>
+          </a:p>
+          <a:p>
+            <a:pPr algn="ctr"/>
+            <a:r>
+              <a:rPr sz="1200" b="0">
+                <a:solidFill>
+                  <a:srgbClr val="22272E"/>
+                </a:solidFill>
+                <a:latin typeface="Meiryo"/>
+              </a:rPr>
+              <a:t> 特徴平均のスペックでは単語の中身まで運べない)</a:t>
+            </a:r>
+          </a:p>
+        </p:txBody>
+      </p:sp>
+      <p:sp>
+        <p:nvSpPr>
+          <p:cNvPr id="9" name="TextBox 8"/>
+          <p:cNvSpPr txBox="1"/>
+          <p:nvPr/>
+        </p:nvSpPr>
+        <p:spPr>
+          <a:xfrm>
+            <a:off x="502920" y="5349240"/>
+            <a:ext cx="11247120" cy="1188720"/>
+          </a:xfrm>
+          <a:prstGeom prst="rect">
+            <a:avLst/>
+          </a:prstGeom>
+          <a:noFill/>
+        </p:spPr>
+        <p:txBody>
+          <a:bodyPr wrap="square">
+            <a:spAutoFit/>
+          </a:bodyPr>
+          <a:lstStyle/>
+          <a:p>
+            <a:pPr algn="l">
+              <a:lnSpc>
+                <a:spcPct val="115000"/>
+              </a:lnSpc>
+            </a:pPr>
+            <a:r>
+              <a:rPr sz="1400" b="0">
+                <a:solidFill>
+                  <a:srgbClr val="5A6472"/>
+                </a:solidFill>
+                <a:latin typeface="Meiryo"/>
+              </a:rPr>
+              <a:t>まとめ: promptingの失敗=「効きすぎ」(指定に従わない編集 → 介入としての特異性がない)。</a:t>
+            </a:r>
+          </a:p>
+          <a:p>
+            <a:pPr algn="l">
+              <a:lnSpc>
+                <a:spcPct val="115000"/>
+              </a:lnSpc>
+            </a:pPr>
+            <a:r>
+              <a:rPr sz="1400" b="0">
+                <a:solidFill>
+                  <a:srgbClr val="5A6472"/>
+                </a:solidFill>
+                <a:latin typeface="Meiryo"/>
+              </a:rPr>
+              <a:t>本手法の失敗=「効かなさすぎ」(発火不足・語彙固有の編集)。改善はToDo②のスペック較正と追加学習が対応。</a:t>
+            </a:r>
+          </a:p>
+        </p:txBody>
+      </p:sp>
+    </p:spTree>
+  </p:cSld>
+  <p:clrMapOvr>
+    <a:masterClrMapping/>
+  </p:clrMapOvr>
+</p:sld>
+</file>
+
+<file path=ppt/slides/slide15.xml><?xml version="1.0" encoding="utf-8"?>
+<p:sld xmlns:a="http://schemas.openxmlformats.org/drawingml/2006/main" xmlns:p="http://schemas.openxmlformats.org/presentationml/2006/main" xmlns:r="http://schemas.openxmlformats.org/officeDocument/2006/relationships">
+  <p:cSld>
+    <p:spTree>
+      <p:nvGrpSpPr>
+        <p:cNvPr id="1" name=""/>
+        <p:cNvGrpSpPr/>
+        <p:nvPr/>
+      </p:nvGrpSpPr>
+      <p:grpSpPr/>
+      <p:sp>
+        <p:nvSpPr>
+          <p:cNvPr id="2" name="Rectangle 1"/>
+          <p:cNvSpPr/>
+          <p:nvPr/>
+        </p:nvSpPr>
+        <p:spPr>
+          <a:xfrm>
+            <a:off x="0" y="0"/>
+            <a:ext cx="12191695" cy="146304"/>
+          </a:xfrm>
+          <a:prstGeom prst="rect">
+            <a:avLst/>
+          </a:prstGeom>
+          <a:solidFill>
+            <a:srgbClr val="0E7C66"/>
+          </a:solidFill>
+          <a:ln>
+            <a:noFill/>
+          </a:ln>
+        </p:spPr>
+        <p:style>
+          <a:lnRef idx="1">
+            <a:schemeClr val="accent1"/>
+          </a:lnRef>
+          <a:fillRef idx="3">
+            <a:schemeClr val="accent1"/>
+          </a:fillRef>
+          <a:effectRef idx="2">
+            <a:schemeClr val="accent1"/>
+          </a:effectRef>
+          <a:fontRef idx="minor">
+            <a:schemeClr val="lt1"/>
+          </a:fontRef>
+        </p:style>
+        <p:txBody>
+          <a:bodyPr rtlCol="0" anchor="ctr"/>
+          <a:lstStyle/>
+          <a:p>
+            <a:pPr algn="ctr"/>
+          </a:p>
+        </p:txBody>
+      </p:sp>
+      <p:sp>
+        <p:nvSpPr>
+          <p:cNvPr id="3" name="TextBox 2"/>
+          <p:cNvSpPr txBox="1"/>
+          <p:nvPr/>
+        </p:nvSpPr>
+        <p:spPr>
+          <a:xfrm>
+            <a:off x="502920" y="256032"/>
+            <a:ext cx="11247120" cy="731520"/>
+          </a:xfrm>
+          <a:prstGeom prst="rect">
+            <a:avLst/>
+          </a:prstGeom>
+          <a:noFill/>
+        </p:spPr>
+        <p:txBody>
+          <a:bodyPr wrap="square">
+            <a:spAutoFit/>
+          </a:bodyPr>
+          <a:lstStyle/>
+          <a:p>
+            <a:pPr algn="l">
+              <a:lnSpc>
+                <a:spcPct val="115000"/>
+              </a:lnSpc>
+            </a:pPr>
+            <a:r>
+              <a:rPr sz="2700" b="1">
+                <a:solidFill>
+                  <a:srgbClr val="22272E"/>
+                </a:solidFill>
+                <a:latin typeface="Meiryo"/>
+              </a:rPr>
               <a:t>残り1週間のToDo</a:t>
             </a:r>
           </a:p>
